--- a/figures/CST_TTD_polyline_coord.pptx
+++ b/figures/CST_TTD_polyline_coord.pptx
@@ -4202,49 +4202,6 @@
           <a:xfrm>
             <a:off x="5479344" y="4048125"/>
             <a:ext cx="765672" cy="1"/>
-          </a:xfrm>
-          <a:prstGeom prst="line">
-            <a:avLst/>
-          </a:prstGeom>
-          <a:ln w="38100">
-            <a:solidFill>
-              <a:schemeClr val="accent2"/>
-            </a:solidFill>
-          </a:ln>
-        </p:spPr>
-        <p:style>
-          <a:lnRef idx="2">
-            <a:schemeClr val="accent1"/>
-          </a:lnRef>
-          <a:fillRef idx="0">
-            <a:schemeClr val="accent1"/>
-          </a:fillRef>
-          <a:effectRef idx="1">
-            <a:schemeClr val="accent1"/>
-          </a:effectRef>
-          <a:fontRef idx="minor">
-            <a:schemeClr val="tx1"/>
-          </a:fontRef>
-        </p:style>
-      </p:cxnSp>
-      <p:cxnSp>
-        <p:nvCxnSpPr>
-          <p:cNvPr id="34" name="Straight Connector 33">
-            <a:extLst>
-              <a:ext uri="{FF2B5EF4-FFF2-40B4-BE49-F238E27FC236}">
-                <a16:creationId xmlns:a16="http://schemas.microsoft.com/office/drawing/2014/main" id="{94939696-ECD3-73E2-1FDD-C94CC959848D}"/>
-              </a:ext>
-            </a:extLst>
-          </p:cNvPr>
-          <p:cNvCxnSpPr>
-            <a:cxnSpLocks/>
-          </p:cNvCxnSpPr>
-          <p:nvPr/>
-        </p:nvCxnSpPr>
-        <p:spPr>
-          <a:xfrm flipH="1" flipV="1">
-            <a:off x="6176762" y="2899819"/>
-            <a:ext cx="0" cy="1148307"/>
           </a:xfrm>
           <a:prstGeom prst="line">
             <a:avLst/>

--- a/figures/CST_TTD_polyline_coord.pptx
+++ b/figures/CST_TTD_polyline_coord.pptx
@@ -104,6 +104,11 @@
       </a:defRPr>
     </a:lvl9pPr>
   </p:defaultTextStyle>
+  <p:extLst>
+    <p:ext uri="{EFAFB233-063F-42B5-8137-9DF3F51BA10A}">
+      <p15:sldGuideLst xmlns:p15="http://schemas.microsoft.com/office/powerpoint/2012/main"/>
+    </p:ext>
+  </p:extLst>
 </p:presentation>
 </file>
 
@@ -238,7 +243,7 @@
           <a:p>
             <a:fld id="{4841CCDE-90AE-4DC4-86E7-13D12ED34910}" type="datetimeFigureOut">
               <a:rPr lang="en-US" smtClean="0"/>
-              <a:t>6/5/2026</a:t>
+              <a:t>6/7/2026</a:t>
             </a:fld>
             <a:endParaRPr lang="en-US"/>
           </a:p>
@@ -408,7 +413,7 @@
           <a:p>
             <a:fld id="{4841CCDE-90AE-4DC4-86E7-13D12ED34910}" type="datetimeFigureOut">
               <a:rPr lang="en-US" smtClean="0"/>
-              <a:t>6/5/2026</a:t>
+              <a:t>6/7/2026</a:t>
             </a:fld>
             <a:endParaRPr lang="en-US"/>
           </a:p>
@@ -588,7 +593,7 @@
           <a:p>
             <a:fld id="{4841CCDE-90AE-4DC4-86E7-13D12ED34910}" type="datetimeFigureOut">
               <a:rPr lang="en-US" smtClean="0"/>
-              <a:t>6/5/2026</a:t>
+              <a:t>6/7/2026</a:t>
             </a:fld>
             <a:endParaRPr lang="en-US"/>
           </a:p>
@@ -758,7 +763,7 @@
           <a:p>
             <a:fld id="{4841CCDE-90AE-4DC4-86E7-13D12ED34910}" type="datetimeFigureOut">
               <a:rPr lang="en-US" smtClean="0"/>
-              <a:t>6/5/2026</a:t>
+              <a:t>6/7/2026</a:t>
             </a:fld>
             <a:endParaRPr lang="en-US"/>
           </a:p>
@@ -1004,7 +1009,7 @@
           <a:p>
             <a:fld id="{4841CCDE-90AE-4DC4-86E7-13D12ED34910}" type="datetimeFigureOut">
               <a:rPr lang="en-US" smtClean="0"/>
-              <a:t>6/5/2026</a:t>
+              <a:t>6/7/2026</a:t>
             </a:fld>
             <a:endParaRPr lang="en-US"/>
           </a:p>
@@ -1236,7 +1241,7 @@
           <a:p>
             <a:fld id="{4841CCDE-90AE-4DC4-86E7-13D12ED34910}" type="datetimeFigureOut">
               <a:rPr lang="en-US" smtClean="0"/>
-              <a:t>6/5/2026</a:t>
+              <a:t>6/7/2026</a:t>
             </a:fld>
             <a:endParaRPr lang="en-US"/>
           </a:p>
@@ -1603,7 +1608,7 @@
           <a:p>
             <a:fld id="{4841CCDE-90AE-4DC4-86E7-13D12ED34910}" type="datetimeFigureOut">
               <a:rPr lang="en-US" smtClean="0"/>
-              <a:t>6/5/2026</a:t>
+              <a:t>6/7/2026</a:t>
             </a:fld>
             <a:endParaRPr lang="en-US"/>
           </a:p>
@@ -1721,7 +1726,7 @@
           <a:p>
             <a:fld id="{4841CCDE-90AE-4DC4-86E7-13D12ED34910}" type="datetimeFigureOut">
               <a:rPr lang="en-US" smtClean="0"/>
-              <a:t>6/5/2026</a:t>
+              <a:t>6/7/2026</a:t>
             </a:fld>
             <a:endParaRPr lang="en-US"/>
           </a:p>
@@ -1816,7 +1821,7 @@
           <a:p>
             <a:fld id="{4841CCDE-90AE-4DC4-86E7-13D12ED34910}" type="datetimeFigureOut">
               <a:rPr lang="en-US" smtClean="0"/>
-              <a:t>6/5/2026</a:t>
+              <a:t>6/7/2026</a:t>
             </a:fld>
             <a:endParaRPr lang="en-US"/>
           </a:p>
@@ -2093,7 +2098,7 @@
           <a:p>
             <a:fld id="{4841CCDE-90AE-4DC4-86E7-13D12ED34910}" type="datetimeFigureOut">
               <a:rPr lang="en-US" smtClean="0"/>
-              <a:t>6/5/2026</a:t>
+              <a:t>6/7/2026</a:t>
             </a:fld>
             <a:endParaRPr lang="en-US"/>
           </a:p>
@@ -2350,7 +2355,7 @@
           <a:p>
             <a:fld id="{4841CCDE-90AE-4DC4-86E7-13D12ED34910}" type="datetimeFigureOut">
               <a:rPr lang="en-US" smtClean="0"/>
-              <a:t>6/5/2026</a:t>
+              <a:t>6/7/2026</a:t>
             </a:fld>
             <a:endParaRPr lang="en-US"/>
           </a:p>
@@ -2563,7 +2568,7 @@
           <a:p>
             <a:fld id="{4841CCDE-90AE-4DC4-86E7-13D12ED34910}" type="datetimeFigureOut">
               <a:rPr lang="en-US" smtClean="0"/>
-              <a:t>6/5/2026</a:t>
+              <a:t>6/7/2026</a:t>
             </a:fld>
             <a:endParaRPr lang="en-US"/>
           </a:p>
@@ -2970,6 +2975,62 @@
       </p:grpSpPr>
       <p:sp>
         <p:nvSpPr>
+          <p:cNvPr id="82" name="Rectangle 81">
+            <a:extLst>
+              <a:ext uri="{FF2B5EF4-FFF2-40B4-BE49-F238E27FC236}">
+                <a16:creationId xmlns:a16="http://schemas.microsoft.com/office/drawing/2014/main" id="{DAA40880-9B03-18FE-8505-E35E2531EA33}"/>
+              </a:ext>
+            </a:extLst>
+          </p:cNvPr>
+          <p:cNvSpPr/>
+          <p:nvPr/>
+        </p:nvSpPr>
+        <p:spPr>
+          <a:xfrm>
+            <a:off x="5985879" y="2635426"/>
+            <a:ext cx="394839" cy="1584683"/>
+          </a:xfrm>
+          <a:prstGeom prst="rect">
+            <a:avLst/>
+          </a:prstGeom>
+          <a:solidFill>
+            <a:schemeClr val="accent2">
+              <a:lumMod val="20000"/>
+              <a:lumOff val="80000"/>
+            </a:schemeClr>
+          </a:solidFill>
+          <a:ln>
+            <a:noFill/>
+          </a:ln>
+          <a:effectLst/>
+        </p:spPr>
+        <p:style>
+          <a:lnRef idx="2">
+            <a:schemeClr val="accent1">
+              <a:shade val="15000"/>
+            </a:schemeClr>
+          </a:lnRef>
+          <a:fillRef idx="1">
+            <a:schemeClr val="accent1"/>
+          </a:fillRef>
+          <a:effectRef idx="0">
+            <a:schemeClr val="accent1"/>
+          </a:effectRef>
+          <a:fontRef idx="minor">
+            <a:schemeClr val="lt1"/>
+          </a:fontRef>
+        </p:style>
+        <p:txBody>
+          <a:bodyPr rtlCol="0" anchor="ctr"/>
+          <a:lstStyle/>
+          <a:p>
+            <a:pPr algn="ctr"/>
+            <a:endParaRPr lang="en-US"/>
+          </a:p>
+        </p:txBody>
+      </p:sp>
+      <p:sp>
+        <p:nvSpPr>
           <p:cNvPr id="86" name="Rectangle 85">
             <a:extLst>
               <a:ext uri="{FF2B5EF4-FFF2-40B4-BE49-F238E27FC236}">
@@ -3539,62 +3600,6 @@
       </p:sp>
       <p:sp>
         <p:nvSpPr>
-          <p:cNvPr id="82" name="Rectangle 81">
-            <a:extLst>
-              <a:ext uri="{FF2B5EF4-FFF2-40B4-BE49-F238E27FC236}">
-                <a16:creationId xmlns:a16="http://schemas.microsoft.com/office/drawing/2014/main" id="{DAA40880-9B03-18FE-8505-E35E2531EA33}"/>
-              </a:ext>
-            </a:extLst>
-          </p:cNvPr>
-          <p:cNvSpPr/>
-          <p:nvPr/>
-        </p:nvSpPr>
-        <p:spPr>
-          <a:xfrm>
-            <a:off x="5985879" y="2635426"/>
-            <a:ext cx="394839" cy="1584683"/>
-          </a:xfrm>
-          <a:prstGeom prst="rect">
-            <a:avLst/>
-          </a:prstGeom>
-          <a:solidFill>
-            <a:schemeClr val="accent2">
-              <a:lumMod val="20000"/>
-              <a:lumOff val="80000"/>
-            </a:schemeClr>
-          </a:solidFill>
-          <a:ln>
-            <a:noFill/>
-          </a:ln>
-          <a:effectLst/>
-        </p:spPr>
-        <p:style>
-          <a:lnRef idx="2">
-            <a:schemeClr val="accent1">
-              <a:shade val="15000"/>
-            </a:schemeClr>
-          </a:lnRef>
-          <a:fillRef idx="1">
-            <a:schemeClr val="accent1"/>
-          </a:fillRef>
-          <a:effectRef idx="0">
-            <a:schemeClr val="accent1"/>
-          </a:effectRef>
-          <a:fontRef idx="minor">
-            <a:schemeClr val="lt1"/>
-          </a:fontRef>
-        </p:style>
-        <p:txBody>
-          <a:bodyPr rtlCol="0" anchor="ctr"/>
-          <a:lstStyle/>
-          <a:p>
-            <a:pPr algn="ctr"/>
-            <a:endParaRPr lang="en-US"/>
-          </a:p>
-        </p:txBody>
-      </p:sp>
-      <p:sp>
-        <p:nvSpPr>
           <p:cNvPr id="81" name="Rectangle 80">
             <a:extLst>
               <a:ext uri="{FF2B5EF4-FFF2-40B4-BE49-F238E27FC236}">
@@ -4194,14 +4199,14 @@
           </p:cNvPr>
           <p:cNvCxnSpPr>
             <a:cxnSpLocks/>
-            <a:endCxn id="50" idx="6"/>
+            <a:endCxn id="50" idx="2"/>
           </p:cNvCxnSpPr>
           <p:nvPr/>
         </p:nvCxnSpPr>
         <p:spPr>
           <a:xfrm>
-            <a:off x="5479344" y="4048125"/>
-            <a:ext cx="765672" cy="1"/>
+            <a:off x="5461876" y="4048125"/>
+            <a:ext cx="656896" cy="1"/>
           </a:xfrm>
           <a:prstGeom prst="line">
             <a:avLst/>
@@ -4733,7 +4738,7 @@
         </p:nvSpPr>
         <p:spPr>
           <a:xfrm>
-            <a:off x="6136240" y="3993738"/>
+            <a:off x="6118772" y="3993738"/>
             <a:ext cx="108776" cy="108776"/>
           </a:xfrm>
           <a:prstGeom prst="ellipse">
@@ -6040,7 +6045,7 @@
         </p:nvCxnSpPr>
         <p:spPr>
           <a:xfrm rot="16200000" flipV="1">
-            <a:off x="5844768" y="3372471"/>
+            <a:off x="5828888" y="3372471"/>
             <a:ext cx="0" cy="663988"/>
           </a:xfrm>
           <a:prstGeom prst="straightConnector1">
@@ -6066,42 +6071,6 @@
           </a:fontRef>
         </p:style>
       </p:cxnSp>
-      <p:sp>
-        <p:nvSpPr>
-          <p:cNvPr id="110" name="TextBox 109">
-            <a:extLst>
-              <a:ext uri="{FF2B5EF4-FFF2-40B4-BE49-F238E27FC236}">
-                <a16:creationId xmlns:a16="http://schemas.microsoft.com/office/drawing/2014/main" id="{78BD1F10-CE78-55D4-8DE7-3CDF96F71531}"/>
-              </a:ext>
-            </a:extLst>
-          </p:cNvPr>
-          <p:cNvSpPr txBox="1"/>
-          <p:nvPr/>
-        </p:nvSpPr>
-        <p:spPr>
-          <a:xfrm>
-            <a:off x="5732750" y="3367146"/>
-            <a:ext cx="1045927" cy="369332"/>
-          </a:xfrm>
-          <a:prstGeom prst="rect">
-            <a:avLst/>
-          </a:prstGeom>
-          <a:noFill/>
-        </p:spPr>
-        <p:txBody>
-          <a:bodyPr wrap="none" rtlCol="0">
-            <a:spAutoFit/>
-          </a:bodyPr>
-          <a:lstStyle/>
-          <a:p>
-            <a:r>
-              <a:rPr lang="en-US" dirty="0" err="1"/>
-              <a:t>s_center</a:t>
-            </a:r>
-            <a:endParaRPr lang="en-US" dirty="0"/>
-          </a:p>
-        </p:txBody>
-      </p:sp>
       <p:cxnSp>
         <p:nvCxnSpPr>
           <p:cNvPr id="37" name="Straight Connector 36">
@@ -6179,7 +6148,7 @@
           <a:p>
             <a:r>
               <a:rPr lang="en-US" dirty="0"/>
-              <a:t>l_1_segment_TTD</a:t>
+              <a:t>l_3_segment_TTD</a:t>
             </a:r>
           </a:p>
         </p:txBody>
@@ -6260,7 +6229,7 @@
           <a:p>
             <a:r>
               <a:rPr lang="en-US" dirty="0"/>
-              <a:t>l_2_segment_TTD</a:t>
+              <a:t>l_4_segment_TTD</a:t>
             </a:r>
           </a:p>
         </p:txBody>
@@ -6307,6 +6276,87 @@
           </a:fontRef>
         </p:style>
       </p:cxnSp>
+      <p:cxnSp>
+        <p:nvCxnSpPr>
+          <p:cNvPr id="2" name="Straight Connector 1">
+            <a:extLst>
+              <a:ext uri="{FF2B5EF4-FFF2-40B4-BE49-F238E27FC236}">
+                <a16:creationId xmlns:a16="http://schemas.microsoft.com/office/drawing/2014/main" id="{53F50DB6-EB11-2977-39ED-FFFFE760689E}"/>
+              </a:ext>
+            </a:extLst>
+          </p:cNvPr>
+          <p:cNvCxnSpPr>
+            <a:cxnSpLocks/>
+            <a:stCxn id="93" idx="4"/>
+            <a:endCxn id="50" idx="0"/>
+          </p:cNvCxnSpPr>
+          <p:nvPr/>
+        </p:nvCxnSpPr>
+        <p:spPr>
+          <a:xfrm>
+            <a:off x="6170443" y="2919111"/>
+            <a:ext cx="2717" cy="1074627"/>
+          </a:xfrm>
+          <a:prstGeom prst="line">
+            <a:avLst/>
+          </a:prstGeom>
+          <a:ln w="38100">
+            <a:solidFill>
+              <a:schemeClr val="accent2"/>
+            </a:solidFill>
+          </a:ln>
+        </p:spPr>
+        <p:style>
+          <a:lnRef idx="2">
+            <a:schemeClr val="accent1"/>
+          </a:lnRef>
+          <a:fillRef idx="0">
+            <a:schemeClr val="accent1"/>
+          </a:fillRef>
+          <a:effectRef idx="1">
+            <a:schemeClr val="accent1"/>
+          </a:effectRef>
+          <a:fontRef idx="minor">
+            <a:schemeClr val="tx1"/>
+          </a:fontRef>
+        </p:style>
+      </p:cxnSp>
+      <p:sp>
+        <p:nvSpPr>
+          <p:cNvPr id="110" name="TextBox 109">
+            <a:extLst>
+              <a:ext uri="{FF2B5EF4-FFF2-40B4-BE49-F238E27FC236}">
+                <a16:creationId xmlns:a16="http://schemas.microsoft.com/office/drawing/2014/main" id="{78BD1F10-CE78-55D4-8DE7-3CDF96F71531}"/>
+              </a:ext>
+            </a:extLst>
+          </p:cNvPr>
+          <p:cNvSpPr txBox="1"/>
+          <p:nvPr/>
+        </p:nvSpPr>
+        <p:spPr>
+          <a:xfrm>
+            <a:off x="5732750" y="3367146"/>
+            <a:ext cx="1045927" cy="369332"/>
+          </a:xfrm>
+          <a:prstGeom prst="rect">
+            <a:avLst/>
+          </a:prstGeom>
+          <a:noFill/>
+        </p:spPr>
+        <p:txBody>
+          <a:bodyPr wrap="none" rtlCol="0">
+            <a:spAutoFit/>
+          </a:bodyPr>
+          <a:lstStyle/>
+          <a:p>
+            <a:r>
+              <a:rPr lang="en-US" dirty="0" err="1"/>
+              <a:t>s_center</a:t>
+            </a:r>
+            <a:endParaRPr lang="en-US" dirty="0"/>
+          </a:p>
+        </p:txBody>
+      </p:sp>
     </p:spTree>
     <p:extLst>
       <p:ext uri="{BB962C8B-B14F-4D97-AF65-F5344CB8AC3E}">

--- a/figures/CST_TTD_polyline_coord.pptx
+++ b/figures/CST_TTD_polyline_coord.pptx
@@ -243,7 +243,7 @@
           <a:p>
             <a:fld id="{4841CCDE-90AE-4DC4-86E7-13D12ED34910}" type="datetimeFigureOut">
               <a:rPr lang="en-US" smtClean="0"/>
-              <a:t>6/7/2026</a:t>
+              <a:t>6/10/2026</a:t>
             </a:fld>
             <a:endParaRPr lang="en-US"/>
           </a:p>
@@ -413,7 +413,7 @@
           <a:p>
             <a:fld id="{4841CCDE-90AE-4DC4-86E7-13D12ED34910}" type="datetimeFigureOut">
               <a:rPr lang="en-US" smtClean="0"/>
-              <a:t>6/7/2026</a:t>
+              <a:t>6/10/2026</a:t>
             </a:fld>
             <a:endParaRPr lang="en-US"/>
           </a:p>
@@ -593,7 +593,7 @@
           <a:p>
             <a:fld id="{4841CCDE-90AE-4DC4-86E7-13D12ED34910}" type="datetimeFigureOut">
               <a:rPr lang="en-US" smtClean="0"/>
-              <a:t>6/7/2026</a:t>
+              <a:t>6/10/2026</a:t>
             </a:fld>
             <a:endParaRPr lang="en-US"/>
           </a:p>
@@ -763,7 +763,7 @@
           <a:p>
             <a:fld id="{4841CCDE-90AE-4DC4-86E7-13D12ED34910}" type="datetimeFigureOut">
               <a:rPr lang="en-US" smtClean="0"/>
-              <a:t>6/7/2026</a:t>
+              <a:t>6/10/2026</a:t>
             </a:fld>
             <a:endParaRPr lang="en-US"/>
           </a:p>
@@ -1009,7 +1009,7 @@
           <a:p>
             <a:fld id="{4841CCDE-90AE-4DC4-86E7-13D12ED34910}" type="datetimeFigureOut">
               <a:rPr lang="en-US" smtClean="0"/>
-              <a:t>6/7/2026</a:t>
+              <a:t>6/10/2026</a:t>
             </a:fld>
             <a:endParaRPr lang="en-US"/>
           </a:p>
@@ -1241,7 +1241,7 @@
           <a:p>
             <a:fld id="{4841CCDE-90AE-4DC4-86E7-13D12ED34910}" type="datetimeFigureOut">
               <a:rPr lang="en-US" smtClean="0"/>
-              <a:t>6/7/2026</a:t>
+              <a:t>6/10/2026</a:t>
             </a:fld>
             <a:endParaRPr lang="en-US"/>
           </a:p>
@@ -1608,7 +1608,7 @@
           <a:p>
             <a:fld id="{4841CCDE-90AE-4DC4-86E7-13D12ED34910}" type="datetimeFigureOut">
               <a:rPr lang="en-US" smtClean="0"/>
-              <a:t>6/7/2026</a:t>
+              <a:t>6/10/2026</a:t>
             </a:fld>
             <a:endParaRPr lang="en-US"/>
           </a:p>
@@ -1726,7 +1726,7 @@
           <a:p>
             <a:fld id="{4841CCDE-90AE-4DC4-86E7-13D12ED34910}" type="datetimeFigureOut">
               <a:rPr lang="en-US" smtClean="0"/>
-              <a:t>6/7/2026</a:t>
+              <a:t>6/10/2026</a:t>
             </a:fld>
             <a:endParaRPr lang="en-US"/>
           </a:p>
@@ -1821,7 +1821,7 @@
           <a:p>
             <a:fld id="{4841CCDE-90AE-4DC4-86E7-13D12ED34910}" type="datetimeFigureOut">
               <a:rPr lang="en-US" smtClean="0"/>
-              <a:t>6/7/2026</a:t>
+              <a:t>6/10/2026</a:t>
             </a:fld>
             <a:endParaRPr lang="en-US"/>
           </a:p>
@@ -2098,7 +2098,7 @@
           <a:p>
             <a:fld id="{4841CCDE-90AE-4DC4-86E7-13D12ED34910}" type="datetimeFigureOut">
               <a:rPr lang="en-US" smtClean="0"/>
-              <a:t>6/7/2026</a:t>
+              <a:t>6/10/2026</a:t>
             </a:fld>
             <a:endParaRPr lang="en-US"/>
           </a:p>
@@ -2355,7 +2355,7 @@
           <a:p>
             <a:fld id="{4841CCDE-90AE-4DC4-86E7-13D12ED34910}" type="datetimeFigureOut">
               <a:rPr lang="en-US" smtClean="0"/>
-              <a:t>6/7/2026</a:t>
+              <a:t>6/10/2026</a:t>
             </a:fld>
             <a:endParaRPr lang="en-US"/>
           </a:p>
@@ -2568,7 +2568,7 @@
           <a:p>
             <a:fld id="{4841CCDE-90AE-4DC4-86E7-13D12ED34910}" type="datetimeFigureOut">
               <a:rPr lang="en-US" smtClean="0"/>
-              <a:t>6/7/2026</a:t>
+              <a:t>6/10/2026</a:t>
             </a:fld>
             <a:endParaRPr lang="en-US"/>
           </a:p>
@@ -2973,12 +2973,54 @@
           <a:chExt cx="0" cy="0"/>
         </a:xfrm>
       </p:grpSpPr>
-      <p:sp>
-        <p:nvSpPr>
-          <p:cNvPr id="82" name="Rectangle 81">
-            <a:extLst>
-              <a:ext uri="{FF2B5EF4-FFF2-40B4-BE49-F238E27FC236}">
-                <a16:creationId xmlns:a16="http://schemas.microsoft.com/office/drawing/2014/main" id="{DAA40880-9B03-18FE-8505-E35E2531EA33}"/>
+      <p:cxnSp>
+        <p:nvCxnSpPr>
+          <p:cNvPr id="14" name="Straight Arrow Connector 13">
+            <a:extLst>
+              <a:ext uri="{FF2B5EF4-FFF2-40B4-BE49-F238E27FC236}">
+                <a16:creationId xmlns:a16="http://schemas.microsoft.com/office/drawing/2014/main" id="{70A54B4F-B66F-E88E-4AED-40FB9623733B}"/>
+              </a:ext>
+            </a:extLst>
+          </p:cNvPr>
+          <p:cNvCxnSpPr>
+            <a:cxnSpLocks/>
+          </p:cNvCxnSpPr>
+          <p:nvPr/>
+        </p:nvCxnSpPr>
+        <p:spPr>
+          <a:xfrm>
+            <a:off x="5840052" y="624018"/>
+            <a:ext cx="11903" cy="7447357"/>
+          </a:xfrm>
+          <a:prstGeom prst="straightConnector1">
+            <a:avLst/>
+          </a:prstGeom>
+          <a:ln>
+            <a:headEnd type="triangle" w="lg" len="lg"/>
+            <a:tailEnd type="none"/>
+          </a:ln>
+        </p:spPr>
+        <p:style>
+          <a:lnRef idx="2">
+            <a:schemeClr val="accent1"/>
+          </a:lnRef>
+          <a:fillRef idx="0">
+            <a:schemeClr val="accent1"/>
+          </a:fillRef>
+          <a:effectRef idx="1">
+            <a:schemeClr val="accent1"/>
+          </a:effectRef>
+          <a:fontRef idx="minor">
+            <a:schemeClr val="tx1"/>
+          </a:fontRef>
+        </p:style>
+      </p:cxnSp>
+      <p:sp>
+        <p:nvSpPr>
+          <p:cNvPr id="136" name="Rectangle 135">
+            <a:extLst>
+              <a:ext uri="{FF2B5EF4-FFF2-40B4-BE49-F238E27FC236}">
+                <a16:creationId xmlns:a16="http://schemas.microsoft.com/office/drawing/2014/main" id="{7B9CBEBB-6442-1C85-58EF-FF495F7DD798}"/>
               </a:ext>
             </a:extLst>
           </p:cNvPr>
@@ -2987,8 +3029,8 @@
         </p:nvSpPr>
         <p:spPr>
           <a:xfrm>
-            <a:off x="5985879" y="2635426"/>
-            <a:ext cx="394839" cy="1584683"/>
+            <a:off x="5632153" y="2508502"/>
+            <a:ext cx="394839" cy="957884"/>
           </a:xfrm>
           <a:prstGeom prst="rect">
             <a:avLst/>
@@ -3031,10 +3073,10 @@
       </p:sp>
       <p:sp>
         <p:nvSpPr>
-          <p:cNvPr id="86" name="Rectangle 85">
-            <a:extLst>
-              <a:ext uri="{FF2B5EF4-FFF2-40B4-BE49-F238E27FC236}">
-                <a16:creationId xmlns:a16="http://schemas.microsoft.com/office/drawing/2014/main" id="{34B47D41-15A8-BDEC-AB85-D44012874410}"/>
+          <p:cNvPr id="112" name="Rectangle 111">
+            <a:extLst>
+              <a:ext uri="{FF2B5EF4-FFF2-40B4-BE49-F238E27FC236}">
+                <a16:creationId xmlns:a16="http://schemas.microsoft.com/office/drawing/2014/main" id="{525C7C58-599C-73B3-2A90-D959344D1229}"/>
               </a:ext>
             </a:extLst>
           </p:cNvPr>
@@ -3043,7 +3085,7 @@
         </p:nvSpPr>
         <p:spPr>
           <a:xfrm rot="5400000">
-            <a:off x="4699326" y="2730641"/>
+            <a:off x="4996708" y="3322004"/>
             <a:ext cx="394839" cy="1463703"/>
           </a:xfrm>
           <a:prstGeom prst="rect">
@@ -3087,10 +3129,10 @@
       </p:sp>
       <p:sp>
         <p:nvSpPr>
-          <p:cNvPr id="87" name="Rectangle 86">
-            <a:extLst>
-              <a:ext uri="{FF2B5EF4-FFF2-40B4-BE49-F238E27FC236}">
-                <a16:creationId xmlns:a16="http://schemas.microsoft.com/office/drawing/2014/main" id="{960D4A84-24E9-34C2-A56C-FD063E538713}"/>
+          <p:cNvPr id="113" name="Rectangle 112">
+            <a:extLst>
+              <a:ext uri="{FF2B5EF4-FFF2-40B4-BE49-F238E27FC236}">
+                <a16:creationId xmlns:a16="http://schemas.microsoft.com/office/drawing/2014/main" id="{B010F2BD-087B-B394-D5AB-338868F58662}"/>
               </a:ext>
             </a:extLst>
           </p:cNvPr>
@@ -3099,7 +3141,7 @@
         </p:nvSpPr>
         <p:spPr>
           <a:xfrm rot="5400000">
-            <a:off x="4725876" y="1994176"/>
+            <a:off x="5023258" y="2585539"/>
             <a:ext cx="394839" cy="1463703"/>
           </a:xfrm>
           <a:prstGeom prst="rect">
@@ -3143,10 +3185,10 @@
       </p:sp>
       <p:sp>
         <p:nvSpPr>
-          <p:cNvPr id="88" name="Rectangle 87">
-            <a:extLst>
-              <a:ext uri="{FF2B5EF4-FFF2-40B4-BE49-F238E27FC236}">
-                <a16:creationId xmlns:a16="http://schemas.microsoft.com/office/drawing/2014/main" id="{3147B2F3-E2E3-75FE-3766-54FD8563BDBE}"/>
+          <p:cNvPr id="114" name="Rectangle 113">
+            <a:extLst>
+              <a:ext uri="{FF2B5EF4-FFF2-40B4-BE49-F238E27FC236}">
+                <a16:creationId xmlns:a16="http://schemas.microsoft.com/office/drawing/2014/main" id="{A50C37D8-9119-F3E7-DAD9-A4964704B02D}"/>
               </a:ext>
             </a:extLst>
           </p:cNvPr>
@@ -3154,9 +3196,9 @@
           <p:nvPr/>
         </p:nvSpPr>
         <p:spPr>
-          <a:xfrm rot="5400000">
-            <a:off x="6394451" y="2233001"/>
-            <a:ext cx="394839" cy="1204123"/>
+          <a:xfrm>
+            <a:off x="4249125" y="3110922"/>
+            <a:ext cx="394839" cy="1140348"/>
           </a:xfrm>
           <a:prstGeom prst="rect">
             <a:avLst/>
@@ -3197,36 +3239,163 @@
           </a:p>
         </p:txBody>
       </p:sp>
-      <p:sp>
-        <p:nvSpPr>
-          <p:cNvPr id="89" name="Rectangle 88">
-            <a:extLst>
-              <a:ext uri="{FF2B5EF4-FFF2-40B4-BE49-F238E27FC236}">
-                <a16:creationId xmlns:a16="http://schemas.microsoft.com/office/drawing/2014/main" id="{23551C4F-348F-BD03-8076-8ED6678EFC9E}"/>
-              </a:ext>
-            </a:extLst>
-          </p:cNvPr>
-          <p:cNvSpPr/>
-          <p:nvPr/>
-        </p:nvSpPr>
-        <p:spPr>
-          <a:xfrm>
-            <a:off x="3951743" y="2519559"/>
-            <a:ext cx="394839" cy="1140348"/>
-          </a:xfrm>
-          <a:prstGeom prst="rect">
-            <a:avLst/>
-          </a:prstGeom>
-          <a:solidFill>
-            <a:schemeClr val="accent2">
-              <a:lumMod val="20000"/>
-              <a:lumOff val="80000"/>
-            </a:schemeClr>
+      <p:cxnSp>
+        <p:nvCxnSpPr>
+          <p:cNvPr id="115" name="Straight Connector 114">
+            <a:extLst>
+              <a:ext uri="{FF2B5EF4-FFF2-40B4-BE49-F238E27FC236}">
+                <a16:creationId xmlns:a16="http://schemas.microsoft.com/office/drawing/2014/main" id="{AE83B081-15E9-71DB-1782-1C241E4C9B69}"/>
+              </a:ext>
+            </a:extLst>
+          </p:cNvPr>
+          <p:cNvCxnSpPr>
+            <a:cxnSpLocks/>
+          </p:cNvCxnSpPr>
+          <p:nvPr/>
+        </p:nvCxnSpPr>
+        <p:spPr>
+          <a:xfrm flipH="1">
+            <a:off x="4462277" y="3315513"/>
+            <a:ext cx="1304923" cy="0"/>
+          </a:xfrm>
+          <a:prstGeom prst="line">
+            <a:avLst/>
+          </a:prstGeom>
+          <a:ln w="38100">
+            <a:solidFill>
+              <a:schemeClr val="accent2"/>
+            </a:solidFill>
+          </a:ln>
+        </p:spPr>
+        <p:style>
+          <a:lnRef idx="2">
+            <a:schemeClr val="accent1"/>
+          </a:lnRef>
+          <a:fillRef idx="0">
+            <a:schemeClr val="accent1"/>
+          </a:fillRef>
+          <a:effectRef idx="1">
+            <a:schemeClr val="accent1"/>
+          </a:effectRef>
+          <a:fontRef idx="minor">
+            <a:schemeClr val="tx1"/>
+          </a:fontRef>
+        </p:style>
+      </p:cxnSp>
+      <p:cxnSp>
+        <p:nvCxnSpPr>
+          <p:cNvPr id="116" name="Straight Connector 115">
+            <a:extLst>
+              <a:ext uri="{FF2B5EF4-FFF2-40B4-BE49-F238E27FC236}">
+                <a16:creationId xmlns:a16="http://schemas.microsoft.com/office/drawing/2014/main" id="{9AB059FE-4046-C07A-D732-45D85B60587E}"/>
+              </a:ext>
+            </a:extLst>
+          </p:cNvPr>
+          <p:cNvCxnSpPr>
+            <a:cxnSpLocks/>
+          </p:cNvCxnSpPr>
+          <p:nvPr/>
+        </p:nvCxnSpPr>
+        <p:spPr>
+          <a:xfrm flipH="1">
+            <a:off x="4462277" y="4048938"/>
+            <a:ext cx="1304923" cy="0"/>
+          </a:xfrm>
+          <a:prstGeom prst="line">
+            <a:avLst/>
+          </a:prstGeom>
+          <a:ln w="38100">
+            <a:solidFill>
+              <a:schemeClr val="accent2"/>
+            </a:solidFill>
+          </a:ln>
+        </p:spPr>
+        <p:style>
+          <a:lnRef idx="2">
+            <a:schemeClr val="accent1"/>
+          </a:lnRef>
+          <a:fillRef idx="0">
+            <a:schemeClr val="accent1"/>
+          </a:fillRef>
+          <a:effectRef idx="1">
+            <a:schemeClr val="accent1"/>
+          </a:effectRef>
+          <a:fontRef idx="minor">
+            <a:schemeClr val="tx1"/>
+          </a:fontRef>
+        </p:style>
+      </p:cxnSp>
+      <p:cxnSp>
+        <p:nvCxnSpPr>
+          <p:cNvPr id="117" name="Straight Connector 116">
+            <a:extLst>
+              <a:ext uri="{FF2B5EF4-FFF2-40B4-BE49-F238E27FC236}">
+                <a16:creationId xmlns:a16="http://schemas.microsoft.com/office/drawing/2014/main" id="{4866A252-8B5D-AF87-AAEF-03374D72AB8F}"/>
+              </a:ext>
+            </a:extLst>
+          </p:cNvPr>
+          <p:cNvCxnSpPr>
+            <a:cxnSpLocks/>
+          </p:cNvCxnSpPr>
+          <p:nvPr/>
+        </p:nvCxnSpPr>
+        <p:spPr>
+          <a:xfrm flipH="1">
+            <a:off x="4462277" y="3315515"/>
+            <a:ext cx="1" cy="733425"/>
+          </a:xfrm>
+          <a:prstGeom prst="line">
+            <a:avLst/>
+          </a:prstGeom>
+          <a:ln w="38100">
+            <a:solidFill>
+              <a:schemeClr val="accent2"/>
+            </a:solidFill>
+          </a:ln>
+        </p:spPr>
+        <p:style>
+          <a:lnRef idx="2">
+            <a:schemeClr val="accent1"/>
+          </a:lnRef>
+          <a:fillRef idx="0">
+            <a:schemeClr val="accent1"/>
+          </a:fillRef>
+          <a:effectRef idx="1">
+            <a:schemeClr val="accent1"/>
+          </a:effectRef>
+          <a:fontRef idx="minor">
+            <a:schemeClr val="tx1"/>
+          </a:fontRef>
+        </p:style>
+      </p:cxnSp>
+      <p:sp>
+        <p:nvSpPr>
+          <p:cNvPr id="118" name="Oval 117">
+            <a:extLst>
+              <a:ext uri="{FF2B5EF4-FFF2-40B4-BE49-F238E27FC236}">
+                <a16:creationId xmlns:a16="http://schemas.microsoft.com/office/drawing/2014/main" id="{AF5DB741-DF95-D7BD-4E5B-6DB82E61077C}"/>
+              </a:ext>
+            </a:extLst>
+          </p:cNvPr>
+          <p:cNvSpPr>
+            <a:spLocks noChangeAspect="1"/>
+          </p:cNvSpPr>
+          <p:nvPr/>
+        </p:nvSpPr>
+        <p:spPr>
+          <a:xfrm>
+            <a:off x="5712812" y="3263473"/>
+            <a:ext cx="108776" cy="108776"/>
+          </a:xfrm>
+          <a:prstGeom prst="ellipse">
+            <a:avLst/>
+          </a:prstGeom>
+          <a:solidFill>
+            <a:schemeClr val="accent2"/>
           </a:solidFill>
           <a:ln>
             <a:noFill/>
           </a:ln>
-          <a:effectLst/>
         </p:spPr>
         <p:style>
           <a:lnRef idx="2">
@@ -3255,34 +3424,32 @@
       </p:sp>
       <p:sp>
         <p:nvSpPr>
-          <p:cNvPr id="85" name="Rectangle 84">
-            <a:extLst>
-              <a:ext uri="{FF2B5EF4-FFF2-40B4-BE49-F238E27FC236}">
-                <a16:creationId xmlns:a16="http://schemas.microsoft.com/office/drawing/2014/main" id="{2F0F69C7-D80B-251C-DED5-672E78C2BD97}"/>
-              </a:ext>
-            </a:extLst>
-          </p:cNvPr>
-          <p:cNvSpPr/>
-          <p:nvPr/>
-        </p:nvSpPr>
-        <p:spPr>
-          <a:xfrm rot="5400000">
-            <a:off x="5619497" y="3478790"/>
-            <a:ext cx="394839" cy="1110093"/>
-          </a:xfrm>
-          <a:prstGeom prst="rect">
-            <a:avLst/>
-          </a:prstGeom>
-          <a:solidFill>
-            <a:schemeClr val="accent2">
-              <a:lumMod val="20000"/>
-              <a:lumOff val="80000"/>
-            </a:schemeClr>
+          <p:cNvPr id="121" name="Oval 120">
+            <a:extLst>
+              <a:ext uri="{FF2B5EF4-FFF2-40B4-BE49-F238E27FC236}">
+                <a16:creationId xmlns:a16="http://schemas.microsoft.com/office/drawing/2014/main" id="{BB12C929-3F16-7009-9FEC-B8EFCE7A5071}"/>
+              </a:ext>
+            </a:extLst>
+          </p:cNvPr>
+          <p:cNvSpPr>
+            <a:spLocks noChangeAspect="1"/>
+          </p:cNvSpPr>
+          <p:nvPr/>
+        </p:nvSpPr>
+        <p:spPr>
+          <a:xfrm>
+            <a:off x="4407888" y="3263473"/>
+            <a:ext cx="108776" cy="108776"/>
+          </a:xfrm>
+          <a:prstGeom prst="ellipse">
+            <a:avLst/>
+          </a:prstGeom>
+          <a:solidFill>
+            <a:schemeClr val="accent2"/>
           </a:solidFill>
           <a:ln>
             <a:noFill/>
           </a:ln>
-          <a:effectLst/>
         </p:spPr>
         <p:style>
           <a:lnRef idx="2">
@@ -3309,6 +3476,156 @@
           </a:p>
         </p:txBody>
       </p:sp>
+      <p:sp>
+        <p:nvSpPr>
+          <p:cNvPr id="122" name="Oval 121">
+            <a:extLst>
+              <a:ext uri="{FF2B5EF4-FFF2-40B4-BE49-F238E27FC236}">
+                <a16:creationId xmlns:a16="http://schemas.microsoft.com/office/drawing/2014/main" id="{CDEE48E9-9D32-8701-2F65-F31D5E9C7292}"/>
+              </a:ext>
+            </a:extLst>
+          </p:cNvPr>
+          <p:cNvSpPr>
+            <a:spLocks noChangeAspect="1"/>
+          </p:cNvSpPr>
+          <p:nvPr/>
+        </p:nvSpPr>
+        <p:spPr>
+          <a:xfrm>
+            <a:off x="4407888" y="3994550"/>
+            <a:ext cx="108776" cy="108776"/>
+          </a:xfrm>
+          <a:prstGeom prst="ellipse">
+            <a:avLst/>
+          </a:prstGeom>
+          <a:solidFill>
+            <a:schemeClr val="accent2"/>
+          </a:solidFill>
+          <a:ln>
+            <a:noFill/>
+          </a:ln>
+        </p:spPr>
+        <p:style>
+          <a:lnRef idx="2">
+            <a:schemeClr val="accent1">
+              <a:shade val="15000"/>
+            </a:schemeClr>
+          </a:lnRef>
+          <a:fillRef idx="1">
+            <a:schemeClr val="accent1"/>
+          </a:fillRef>
+          <a:effectRef idx="0">
+            <a:schemeClr val="accent1"/>
+          </a:effectRef>
+          <a:fontRef idx="minor">
+            <a:schemeClr val="lt1"/>
+          </a:fontRef>
+        </p:style>
+        <p:txBody>
+          <a:bodyPr rtlCol="0" anchor="ctr"/>
+          <a:lstStyle/>
+          <a:p>
+            <a:pPr algn="ctr"/>
+            <a:endParaRPr lang="en-US"/>
+          </a:p>
+        </p:txBody>
+      </p:sp>
+      <p:sp>
+        <p:nvSpPr>
+          <p:cNvPr id="125" name="Oval 124">
+            <a:extLst>
+              <a:ext uri="{FF2B5EF4-FFF2-40B4-BE49-F238E27FC236}">
+                <a16:creationId xmlns:a16="http://schemas.microsoft.com/office/drawing/2014/main" id="{0A9D71D3-1C53-48C8-4F9A-96C4ABFC2AEF}"/>
+              </a:ext>
+            </a:extLst>
+          </p:cNvPr>
+          <p:cNvSpPr>
+            <a:spLocks noChangeAspect="1"/>
+          </p:cNvSpPr>
+          <p:nvPr/>
+        </p:nvSpPr>
+        <p:spPr>
+          <a:xfrm>
+            <a:off x="5712812" y="3994550"/>
+            <a:ext cx="108776" cy="108776"/>
+          </a:xfrm>
+          <a:prstGeom prst="ellipse">
+            <a:avLst/>
+          </a:prstGeom>
+          <a:solidFill>
+            <a:schemeClr val="accent2"/>
+          </a:solidFill>
+          <a:ln>
+            <a:noFill/>
+          </a:ln>
+        </p:spPr>
+        <p:style>
+          <a:lnRef idx="2">
+            <a:schemeClr val="accent1">
+              <a:shade val="15000"/>
+            </a:schemeClr>
+          </a:lnRef>
+          <a:fillRef idx="1">
+            <a:schemeClr val="accent1"/>
+          </a:fillRef>
+          <a:effectRef idx="0">
+            <a:schemeClr val="accent1"/>
+          </a:effectRef>
+          <a:fontRef idx="minor">
+            <a:schemeClr val="lt1"/>
+          </a:fontRef>
+        </p:style>
+        <p:txBody>
+          <a:bodyPr rtlCol="0" anchor="ctr"/>
+          <a:lstStyle/>
+          <a:p>
+            <a:pPr algn="ctr"/>
+            <a:endParaRPr lang="en-US"/>
+          </a:p>
+        </p:txBody>
+      </p:sp>
+      <p:cxnSp>
+        <p:nvCxnSpPr>
+          <p:cNvPr id="126" name="Straight Arrow Connector 125">
+            <a:extLst>
+              <a:ext uri="{FF2B5EF4-FFF2-40B4-BE49-F238E27FC236}">
+                <a16:creationId xmlns:a16="http://schemas.microsoft.com/office/drawing/2014/main" id="{C72E6691-1E14-5872-F5AA-AE8885C0CF9B}"/>
+              </a:ext>
+            </a:extLst>
+          </p:cNvPr>
+          <p:cNvCxnSpPr>
+            <a:cxnSpLocks/>
+          </p:cNvCxnSpPr>
+          <p:nvPr/>
+        </p:nvCxnSpPr>
+        <p:spPr>
+          <a:xfrm flipH="1">
+            <a:off x="4204189" y="4385200"/>
+            <a:ext cx="1344072" cy="0"/>
+          </a:xfrm>
+          <a:prstGeom prst="straightConnector1">
+            <a:avLst/>
+          </a:prstGeom>
+          <a:ln>
+            <a:headEnd type="triangle" w="lg" len="lg"/>
+            <a:tailEnd type="triangle" w="lg" len="lg"/>
+          </a:ln>
+        </p:spPr>
+        <p:style>
+          <a:lnRef idx="2">
+            <a:schemeClr val="accent1"/>
+          </a:lnRef>
+          <a:fillRef idx="0">
+            <a:schemeClr val="accent1"/>
+          </a:fillRef>
+          <a:effectRef idx="1">
+            <a:schemeClr val="accent1"/>
+          </a:effectRef>
+          <a:fontRef idx="minor">
+            <a:schemeClr val="tx1"/>
+          </a:fontRef>
+        </p:style>
+      </p:cxnSp>
       <p:grpSp>
         <p:nvGrpSpPr>
           <p:cNvPr id="9" name="Group 8">
@@ -3323,7 +3640,7 @@
         </p:nvGrpSpPr>
         <p:grpSpPr>
           <a:xfrm rot="5400000">
-            <a:off x="6017508" y="4200527"/>
+            <a:off x="7280527" y="4467405"/>
             <a:ext cx="6353175" cy="885825"/>
             <a:chOff x="1971675" y="447675"/>
             <a:chExt cx="6353175" cy="885825"/>
@@ -3488,10 +3805,10 @@
       </p:grpSp>
       <p:sp>
         <p:nvSpPr>
-          <p:cNvPr id="84" name="Rectangle 83">
-            <a:extLst>
-              <a:ext uri="{FF2B5EF4-FFF2-40B4-BE49-F238E27FC236}">
-                <a16:creationId xmlns:a16="http://schemas.microsoft.com/office/drawing/2014/main" id="{F79474F2-72A7-4A4F-75A1-746CAF8EB8E6}"/>
+          <p:cNvPr id="72" name="Rectangle 71">
+            <a:extLst>
+              <a:ext uri="{FF2B5EF4-FFF2-40B4-BE49-F238E27FC236}">
+                <a16:creationId xmlns:a16="http://schemas.microsoft.com/office/drawing/2014/main" id="{ABFCDBF4-9A5C-7A80-CFD3-E48A5BF04C5D}"/>
               </a:ext>
             </a:extLst>
           </p:cNvPr>
@@ -3500,8 +3817,8 @@
         </p:nvSpPr>
         <p:spPr>
           <a:xfrm rot="5400000">
-            <a:off x="7909754" y="3333120"/>
-            <a:ext cx="394839" cy="2621507"/>
+            <a:off x="9567295" y="4053719"/>
+            <a:ext cx="394839" cy="1843693"/>
           </a:xfrm>
           <a:prstGeom prst="rect">
             <a:avLst/>
@@ -3542,12 +3859,97 @@
           </a:p>
         </p:txBody>
       </p:sp>
-      <p:sp>
-        <p:nvSpPr>
-          <p:cNvPr id="83" name="Rectangle 82">
-            <a:extLst>
-              <a:ext uri="{FF2B5EF4-FFF2-40B4-BE49-F238E27FC236}">
-                <a16:creationId xmlns:a16="http://schemas.microsoft.com/office/drawing/2014/main" id="{891FC51E-FABA-7FDD-921C-457EC36D3B99}"/>
+      <p:cxnSp>
+        <p:nvCxnSpPr>
+          <p:cNvPr id="16" name="Straight Arrow Connector 15">
+            <a:extLst>
+              <a:ext uri="{FF2B5EF4-FFF2-40B4-BE49-F238E27FC236}">
+                <a16:creationId xmlns:a16="http://schemas.microsoft.com/office/drawing/2014/main" id="{6E0E2CFE-7737-4370-B074-57FEB118BA15}"/>
+              </a:ext>
+            </a:extLst>
+          </p:cNvPr>
+          <p:cNvCxnSpPr>
+            <a:cxnSpLocks/>
+          </p:cNvCxnSpPr>
+          <p:nvPr/>
+        </p:nvCxnSpPr>
+        <p:spPr>
+          <a:xfrm flipH="1">
+            <a:off x="2675370" y="4980511"/>
+            <a:ext cx="8329613" cy="2"/>
+          </a:xfrm>
+          <a:prstGeom prst="straightConnector1">
+            <a:avLst/>
+          </a:prstGeom>
+          <a:ln>
+            <a:headEnd type="triangle" w="lg" len="lg"/>
+            <a:tailEnd type="none"/>
+          </a:ln>
+        </p:spPr>
+        <p:style>
+          <a:lnRef idx="2">
+            <a:schemeClr val="accent1"/>
+          </a:lnRef>
+          <a:fillRef idx="0">
+            <a:schemeClr val="accent1"/>
+          </a:fillRef>
+          <a:effectRef idx="1">
+            <a:schemeClr val="accent1"/>
+          </a:effectRef>
+          <a:fontRef idx="minor">
+            <a:schemeClr val="tx1"/>
+          </a:fontRef>
+        </p:style>
+      </p:cxnSp>
+      <p:cxnSp>
+        <p:nvCxnSpPr>
+          <p:cNvPr id="36" name="Straight Connector 35">
+            <a:extLst>
+              <a:ext uri="{FF2B5EF4-FFF2-40B4-BE49-F238E27FC236}">
+                <a16:creationId xmlns:a16="http://schemas.microsoft.com/office/drawing/2014/main" id="{9EE5F221-5D4D-BCA9-6C42-49623B90F893}"/>
+              </a:ext>
+            </a:extLst>
+          </p:cNvPr>
+          <p:cNvCxnSpPr>
+            <a:cxnSpLocks/>
+          </p:cNvCxnSpPr>
+          <p:nvPr/>
+        </p:nvCxnSpPr>
+        <p:spPr>
+          <a:xfrm flipV="1">
+            <a:off x="9057022" y="4975565"/>
+            <a:ext cx="1597425" cy="0"/>
+          </a:xfrm>
+          <a:prstGeom prst="line">
+            <a:avLst/>
+          </a:prstGeom>
+          <a:ln w="38100">
+            <a:solidFill>
+              <a:schemeClr val="accent2"/>
+            </a:solidFill>
+          </a:ln>
+        </p:spPr>
+        <p:style>
+          <a:lnRef idx="2">
+            <a:schemeClr val="accent1"/>
+          </a:lnRef>
+          <a:fillRef idx="0">
+            <a:schemeClr val="accent1"/>
+          </a:fillRef>
+          <a:effectRef idx="1">
+            <a:schemeClr val="accent1"/>
+          </a:effectRef>
+          <a:fontRef idx="minor">
+            <a:schemeClr val="tx1"/>
+          </a:fontRef>
+        </p:style>
+      </p:cxnSp>
+      <p:sp>
+        <p:nvSpPr>
+          <p:cNvPr id="90" name="Rectangle 89">
+            <a:extLst>
+              <a:ext uri="{FF2B5EF4-FFF2-40B4-BE49-F238E27FC236}">
+                <a16:creationId xmlns:a16="http://schemas.microsoft.com/office/drawing/2014/main" id="{E250C868-C9C8-B7AF-E309-981B6EE14AF6}"/>
               </a:ext>
             </a:extLst>
           </p:cNvPr>
@@ -3556,8 +3958,8 @@
         </p:nvSpPr>
         <p:spPr>
           <a:xfrm>
-            <a:off x="6808074" y="2646891"/>
-            <a:ext cx="394839" cy="1977658"/>
+            <a:off x="8842870" y="3104029"/>
+            <a:ext cx="394839" cy="1758862"/>
           </a:xfrm>
           <a:prstGeom prst="rect">
             <a:avLst/>
@@ -3600,10 +4002,10 @@
       </p:sp>
       <p:sp>
         <p:nvSpPr>
-          <p:cNvPr id="81" name="Rectangle 80">
-            <a:extLst>
-              <a:ext uri="{FF2B5EF4-FFF2-40B4-BE49-F238E27FC236}">
-                <a16:creationId xmlns:a16="http://schemas.microsoft.com/office/drawing/2014/main" id="{2E8D53A3-AE1E-D831-6CFE-58D7A4E88EEA}"/>
+          <p:cNvPr id="78" name="Rectangle 77">
+            <a:extLst>
+              <a:ext uri="{FF2B5EF4-FFF2-40B4-BE49-F238E27FC236}">
+                <a16:creationId xmlns:a16="http://schemas.microsoft.com/office/drawing/2014/main" id="{0E5E28AA-2EFC-A9FD-42E0-10C029A3BA0E}"/>
               </a:ext>
             </a:extLst>
           </p:cNvPr>
@@ -3612,8 +4014,8 @@
         </p:nvSpPr>
         <p:spPr>
           <a:xfrm>
-            <a:off x="5261871" y="3423225"/>
-            <a:ext cx="394839" cy="678009"/>
+            <a:off x="8311407" y="3221649"/>
+            <a:ext cx="369333" cy="1758862"/>
           </a:xfrm>
           <a:prstGeom prst="rect">
             <a:avLst/>
@@ -3654,6 +4056,566 @@
           </a:p>
         </p:txBody>
       </p:sp>
+      <p:sp>
+        <p:nvSpPr>
+          <p:cNvPr id="74" name="Rectangle 73">
+            <a:extLst>
+              <a:ext uri="{FF2B5EF4-FFF2-40B4-BE49-F238E27FC236}">
+                <a16:creationId xmlns:a16="http://schemas.microsoft.com/office/drawing/2014/main" id="{7795B59C-BF6C-C04D-6945-814BBC886B71}"/>
+              </a:ext>
+            </a:extLst>
+          </p:cNvPr>
+          <p:cNvSpPr/>
+          <p:nvPr/>
+        </p:nvSpPr>
+        <p:spPr>
+          <a:xfrm rot="5400000">
+            <a:off x="8569257" y="2855856"/>
+            <a:ext cx="394839" cy="899160"/>
+          </a:xfrm>
+          <a:prstGeom prst="rect">
+            <a:avLst/>
+          </a:prstGeom>
+          <a:solidFill>
+            <a:schemeClr val="accent2">
+              <a:lumMod val="20000"/>
+              <a:lumOff val="80000"/>
+            </a:schemeClr>
+          </a:solidFill>
+          <a:ln>
+            <a:noFill/>
+          </a:ln>
+          <a:effectLst/>
+        </p:spPr>
+        <p:style>
+          <a:lnRef idx="2">
+            <a:schemeClr val="accent1">
+              <a:shade val="15000"/>
+            </a:schemeClr>
+          </a:lnRef>
+          <a:fillRef idx="1">
+            <a:schemeClr val="accent1"/>
+          </a:fillRef>
+          <a:effectRef idx="0">
+            <a:schemeClr val="accent1"/>
+          </a:effectRef>
+          <a:fontRef idx="minor">
+            <a:schemeClr val="lt1"/>
+          </a:fontRef>
+        </p:style>
+        <p:txBody>
+          <a:bodyPr rtlCol="0" anchor="ctr"/>
+          <a:lstStyle/>
+          <a:p>
+            <a:pPr algn="ctr"/>
+            <a:endParaRPr lang="en-US"/>
+          </a:p>
+        </p:txBody>
+      </p:sp>
+      <p:sp>
+        <p:nvSpPr>
+          <p:cNvPr id="82" name="Rectangle 81">
+            <a:extLst>
+              <a:ext uri="{FF2B5EF4-FFF2-40B4-BE49-F238E27FC236}">
+                <a16:creationId xmlns:a16="http://schemas.microsoft.com/office/drawing/2014/main" id="{DAA40880-9B03-18FE-8505-E35E2531EA33}"/>
+              </a:ext>
+            </a:extLst>
+          </p:cNvPr>
+          <p:cNvSpPr/>
+          <p:nvPr/>
+        </p:nvSpPr>
+        <p:spPr>
+          <a:xfrm>
+            <a:off x="6368016" y="2972501"/>
+            <a:ext cx="394839" cy="1584683"/>
+          </a:xfrm>
+          <a:prstGeom prst="rect">
+            <a:avLst/>
+          </a:prstGeom>
+          <a:solidFill>
+            <a:schemeClr val="accent2">
+              <a:lumMod val="20000"/>
+              <a:lumOff val="80000"/>
+            </a:schemeClr>
+          </a:solidFill>
+          <a:ln>
+            <a:noFill/>
+          </a:ln>
+          <a:effectLst/>
+        </p:spPr>
+        <p:style>
+          <a:lnRef idx="2">
+            <a:schemeClr val="accent1">
+              <a:shade val="15000"/>
+            </a:schemeClr>
+          </a:lnRef>
+          <a:fillRef idx="1">
+            <a:schemeClr val="accent1"/>
+          </a:fillRef>
+          <a:effectRef idx="0">
+            <a:schemeClr val="accent1"/>
+          </a:effectRef>
+          <a:fontRef idx="minor">
+            <a:schemeClr val="lt1"/>
+          </a:fontRef>
+        </p:style>
+        <p:txBody>
+          <a:bodyPr rtlCol="0" anchor="ctr"/>
+          <a:lstStyle/>
+          <a:p>
+            <a:pPr algn="ctr"/>
+            <a:endParaRPr lang="en-US"/>
+          </a:p>
+        </p:txBody>
+      </p:sp>
+      <p:sp>
+        <p:nvSpPr>
+          <p:cNvPr id="86" name="Rectangle 85">
+            <a:extLst>
+              <a:ext uri="{FF2B5EF4-FFF2-40B4-BE49-F238E27FC236}">
+                <a16:creationId xmlns:a16="http://schemas.microsoft.com/office/drawing/2014/main" id="{34B47D41-15A8-BDEC-AB85-D44012874410}"/>
+              </a:ext>
+            </a:extLst>
+          </p:cNvPr>
+          <p:cNvSpPr/>
+          <p:nvPr/>
+        </p:nvSpPr>
+        <p:spPr>
+          <a:xfrm rot="5400000">
+            <a:off x="5081463" y="1950115"/>
+            <a:ext cx="394839" cy="1463703"/>
+          </a:xfrm>
+          <a:prstGeom prst="rect">
+            <a:avLst/>
+          </a:prstGeom>
+          <a:solidFill>
+            <a:schemeClr val="accent2">
+              <a:lumMod val="20000"/>
+              <a:lumOff val="80000"/>
+            </a:schemeClr>
+          </a:solidFill>
+          <a:ln>
+            <a:noFill/>
+          </a:ln>
+          <a:effectLst/>
+        </p:spPr>
+        <p:style>
+          <a:lnRef idx="2">
+            <a:schemeClr val="accent1">
+              <a:shade val="15000"/>
+            </a:schemeClr>
+          </a:lnRef>
+          <a:fillRef idx="1">
+            <a:schemeClr val="accent1"/>
+          </a:fillRef>
+          <a:effectRef idx="0">
+            <a:schemeClr val="accent1"/>
+          </a:effectRef>
+          <a:fontRef idx="minor">
+            <a:schemeClr val="lt1"/>
+          </a:fontRef>
+        </p:style>
+        <p:txBody>
+          <a:bodyPr rtlCol="0" anchor="ctr"/>
+          <a:lstStyle/>
+          <a:p>
+            <a:pPr algn="ctr"/>
+            <a:endParaRPr lang="en-US"/>
+          </a:p>
+        </p:txBody>
+      </p:sp>
+      <p:sp>
+        <p:nvSpPr>
+          <p:cNvPr id="87" name="Rectangle 86">
+            <a:extLst>
+              <a:ext uri="{FF2B5EF4-FFF2-40B4-BE49-F238E27FC236}">
+                <a16:creationId xmlns:a16="http://schemas.microsoft.com/office/drawing/2014/main" id="{960D4A84-24E9-34C2-A56C-FD063E538713}"/>
+              </a:ext>
+            </a:extLst>
+          </p:cNvPr>
+          <p:cNvSpPr/>
+          <p:nvPr/>
+        </p:nvSpPr>
+        <p:spPr>
+          <a:xfrm rot="5400000">
+            <a:off x="5108013" y="1213650"/>
+            <a:ext cx="394839" cy="1463703"/>
+          </a:xfrm>
+          <a:prstGeom prst="rect">
+            <a:avLst/>
+          </a:prstGeom>
+          <a:solidFill>
+            <a:schemeClr val="accent2">
+              <a:lumMod val="20000"/>
+              <a:lumOff val="80000"/>
+            </a:schemeClr>
+          </a:solidFill>
+          <a:ln>
+            <a:noFill/>
+          </a:ln>
+          <a:effectLst/>
+        </p:spPr>
+        <p:style>
+          <a:lnRef idx="2">
+            <a:schemeClr val="accent1">
+              <a:shade val="15000"/>
+            </a:schemeClr>
+          </a:lnRef>
+          <a:fillRef idx="1">
+            <a:schemeClr val="accent1"/>
+          </a:fillRef>
+          <a:effectRef idx="0">
+            <a:schemeClr val="accent1"/>
+          </a:effectRef>
+          <a:fontRef idx="minor">
+            <a:schemeClr val="lt1"/>
+          </a:fontRef>
+        </p:style>
+        <p:txBody>
+          <a:bodyPr rtlCol="0" anchor="ctr"/>
+          <a:lstStyle/>
+          <a:p>
+            <a:pPr algn="ctr"/>
+            <a:endParaRPr lang="en-US"/>
+          </a:p>
+        </p:txBody>
+      </p:sp>
+      <p:sp>
+        <p:nvSpPr>
+          <p:cNvPr id="88" name="Rectangle 87">
+            <a:extLst>
+              <a:ext uri="{FF2B5EF4-FFF2-40B4-BE49-F238E27FC236}">
+                <a16:creationId xmlns:a16="http://schemas.microsoft.com/office/drawing/2014/main" id="{3147B2F3-E2E3-75FE-3766-54FD8563BDBE}"/>
+              </a:ext>
+            </a:extLst>
+          </p:cNvPr>
+          <p:cNvSpPr/>
+          <p:nvPr/>
+        </p:nvSpPr>
+        <p:spPr>
+          <a:xfrm rot="5400000">
+            <a:off x="6776588" y="2570076"/>
+            <a:ext cx="394839" cy="1204123"/>
+          </a:xfrm>
+          <a:prstGeom prst="rect">
+            <a:avLst/>
+          </a:prstGeom>
+          <a:solidFill>
+            <a:schemeClr val="accent2">
+              <a:lumMod val="20000"/>
+              <a:lumOff val="80000"/>
+            </a:schemeClr>
+          </a:solidFill>
+          <a:ln>
+            <a:noFill/>
+          </a:ln>
+          <a:effectLst/>
+        </p:spPr>
+        <p:style>
+          <a:lnRef idx="2">
+            <a:schemeClr val="accent1">
+              <a:shade val="15000"/>
+            </a:schemeClr>
+          </a:lnRef>
+          <a:fillRef idx="1">
+            <a:schemeClr val="accent1"/>
+          </a:fillRef>
+          <a:effectRef idx="0">
+            <a:schemeClr val="accent1"/>
+          </a:effectRef>
+          <a:fontRef idx="minor">
+            <a:schemeClr val="lt1"/>
+          </a:fontRef>
+        </p:style>
+        <p:txBody>
+          <a:bodyPr rtlCol="0" anchor="ctr"/>
+          <a:lstStyle/>
+          <a:p>
+            <a:pPr algn="ctr"/>
+            <a:endParaRPr lang="en-US"/>
+          </a:p>
+        </p:txBody>
+      </p:sp>
+      <p:sp>
+        <p:nvSpPr>
+          <p:cNvPr id="89" name="Rectangle 88">
+            <a:extLst>
+              <a:ext uri="{FF2B5EF4-FFF2-40B4-BE49-F238E27FC236}">
+                <a16:creationId xmlns:a16="http://schemas.microsoft.com/office/drawing/2014/main" id="{23551C4F-348F-BD03-8076-8ED6678EFC9E}"/>
+              </a:ext>
+            </a:extLst>
+          </p:cNvPr>
+          <p:cNvSpPr/>
+          <p:nvPr/>
+        </p:nvSpPr>
+        <p:spPr>
+          <a:xfrm>
+            <a:off x="4333880" y="1739033"/>
+            <a:ext cx="394839" cy="1140348"/>
+          </a:xfrm>
+          <a:prstGeom prst="rect">
+            <a:avLst/>
+          </a:prstGeom>
+          <a:solidFill>
+            <a:schemeClr val="accent2">
+              <a:lumMod val="20000"/>
+              <a:lumOff val="80000"/>
+            </a:schemeClr>
+          </a:solidFill>
+          <a:ln>
+            <a:noFill/>
+          </a:ln>
+          <a:effectLst/>
+        </p:spPr>
+        <p:style>
+          <a:lnRef idx="2">
+            <a:schemeClr val="accent1">
+              <a:shade val="15000"/>
+            </a:schemeClr>
+          </a:lnRef>
+          <a:fillRef idx="1">
+            <a:schemeClr val="accent1"/>
+          </a:fillRef>
+          <a:effectRef idx="0">
+            <a:schemeClr val="accent1"/>
+          </a:effectRef>
+          <a:fontRef idx="minor">
+            <a:schemeClr val="lt1"/>
+          </a:fontRef>
+        </p:style>
+        <p:txBody>
+          <a:bodyPr rtlCol="0" anchor="ctr"/>
+          <a:lstStyle/>
+          <a:p>
+            <a:pPr algn="ctr"/>
+            <a:endParaRPr lang="en-US"/>
+          </a:p>
+        </p:txBody>
+      </p:sp>
+      <p:sp>
+        <p:nvSpPr>
+          <p:cNvPr id="85" name="Rectangle 84">
+            <a:extLst>
+              <a:ext uri="{FF2B5EF4-FFF2-40B4-BE49-F238E27FC236}">
+                <a16:creationId xmlns:a16="http://schemas.microsoft.com/office/drawing/2014/main" id="{2F0F69C7-D80B-251C-DED5-672E78C2BD97}"/>
+              </a:ext>
+            </a:extLst>
+          </p:cNvPr>
+          <p:cNvSpPr/>
+          <p:nvPr/>
+        </p:nvSpPr>
+        <p:spPr>
+          <a:xfrm rot="5400000">
+            <a:off x="6001634" y="3815865"/>
+            <a:ext cx="394839" cy="1110093"/>
+          </a:xfrm>
+          <a:prstGeom prst="rect">
+            <a:avLst/>
+          </a:prstGeom>
+          <a:solidFill>
+            <a:schemeClr val="accent2">
+              <a:lumMod val="20000"/>
+              <a:lumOff val="80000"/>
+            </a:schemeClr>
+          </a:solidFill>
+          <a:ln>
+            <a:noFill/>
+          </a:ln>
+          <a:effectLst/>
+        </p:spPr>
+        <p:style>
+          <a:lnRef idx="2">
+            <a:schemeClr val="accent1">
+              <a:shade val="15000"/>
+            </a:schemeClr>
+          </a:lnRef>
+          <a:fillRef idx="1">
+            <a:schemeClr val="accent1"/>
+          </a:fillRef>
+          <a:effectRef idx="0">
+            <a:schemeClr val="accent1"/>
+          </a:effectRef>
+          <a:fontRef idx="minor">
+            <a:schemeClr val="lt1"/>
+          </a:fontRef>
+        </p:style>
+        <p:txBody>
+          <a:bodyPr rtlCol="0" anchor="ctr"/>
+          <a:lstStyle/>
+          <a:p>
+            <a:pPr algn="ctr"/>
+            <a:endParaRPr lang="en-US"/>
+          </a:p>
+        </p:txBody>
+      </p:sp>
+      <p:sp>
+        <p:nvSpPr>
+          <p:cNvPr id="84" name="Rectangle 83">
+            <a:extLst>
+              <a:ext uri="{FF2B5EF4-FFF2-40B4-BE49-F238E27FC236}">
+                <a16:creationId xmlns:a16="http://schemas.microsoft.com/office/drawing/2014/main" id="{F79474F2-72A7-4A4F-75A1-746CAF8EB8E6}"/>
+              </a:ext>
+            </a:extLst>
+          </p:cNvPr>
+          <p:cNvSpPr/>
+          <p:nvPr/>
+        </p:nvSpPr>
+        <p:spPr>
+          <a:xfrm rot="5400000">
+            <a:off x="7736200" y="4241762"/>
+            <a:ext cx="394839" cy="1478376"/>
+          </a:xfrm>
+          <a:prstGeom prst="rect">
+            <a:avLst/>
+          </a:prstGeom>
+          <a:solidFill>
+            <a:schemeClr val="accent2">
+              <a:lumMod val="20000"/>
+              <a:lumOff val="80000"/>
+            </a:schemeClr>
+          </a:solidFill>
+          <a:ln>
+            <a:noFill/>
+          </a:ln>
+          <a:effectLst/>
+        </p:spPr>
+        <p:style>
+          <a:lnRef idx="2">
+            <a:schemeClr val="accent1">
+              <a:shade val="15000"/>
+            </a:schemeClr>
+          </a:lnRef>
+          <a:fillRef idx="1">
+            <a:schemeClr val="accent1"/>
+          </a:fillRef>
+          <a:effectRef idx="0">
+            <a:schemeClr val="accent1"/>
+          </a:effectRef>
+          <a:fontRef idx="minor">
+            <a:schemeClr val="lt1"/>
+          </a:fontRef>
+        </p:style>
+        <p:txBody>
+          <a:bodyPr rtlCol="0" anchor="ctr"/>
+          <a:lstStyle/>
+          <a:p>
+            <a:pPr algn="ctr"/>
+            <a:endParaRPr lang="en-US"/>
+          </a:p>
+        </p:txBody>
+      </p:sp>
+      <p:sp>
+        <p:nvSpPr>
+          <p:cNvPr id="83" name="Rectangle 82">
+            <a:extLst>
+              <a:ext uri="{FF2B5EF4-FFF2-40B4-BE49-F238E27FC236}">
+                <a16:creationId xmlns:a16="http://schemas.microsoft.com/office/drawing/2014/main" id="{891FC51E-FABA-7FDD-921C-457EC36D3B99}"/>
+              </a:ext>
+            </a:extLst>
+          </p:cNvPr>
+          <p:cNvSpPr/>
+          <p:nvPr/>
+        </p:nvSpPr>
+        <p:spPr>
+          <a:xfrm>
+            <a:off x="7190211" y="2983966"/>
+            <a:ext cx="394839" cy="1977658"/>
+          </a:xfrm>
+          <a:prstGeom prst="rect">
+            <a:avLst/>
+          </a:prstGeom>
+          <a:solidFill>
+            <a:schemeClr val="accent2">
+              <a:lumMod val="20000"/>
+              <a:lumOff val="80000"/>
+            </a:schemeClr>
+          </a:solidFill>
+          <a:ln>
+            <a:noFill/>
+          </a:ln>
+          <a:effectLst/>
+        </p:spPr>
+        <p:style>
+          <a:lnRef idx="2">
+            <a:schemeClr val="accent1">
+              <a:shade val="15000"/>
+            </a:schemeClr>
+          </a:lnRef>
+          <a:fillRef idx="1">
+            <a:schemeClr val="accent1"/>
+          </a:fillRef>
+          <a:effectRef idx="0">
+            <a:schemeClr val="accent1"/>
+          </a:effectRef>
+          <a:fontRef idx="minor">
+            <a:schemeClr val="lt1"/>
+          </a:fontRef>
+        </p:style>
+        <p:txBody>
+          <a:bodyPr rtlCol="0" anchor="ctr"/>
+          <a:lstStyle/>
+          <a:p>
+            <a:pPr algn="ctr"/>
+            <a:endParaRPr lang="en-US"/>
+          </a:p>
+        </p:txBody>
+      </p:sp>
+      <p:sp>
+        <p:nvSpPr>
+          <p:cNvPr id="81" name="Rectangle 80">
+            <a:extLst>
+              <a:ext uri="{FF2B5EF4-FFF2-40B4-BE49-F238E27FC236}">
+                <a16:creationId xmlns:a16="http://schemas.microsoft.com/office/drawing/2014/main" id="{2E8D53A3-AE1E-D831-6CFE-58D7A4E88EEA}"/>
+              </a:ext>
+            </a:extLst>
+          </p:cNvPr>
+          <p:cNvSpPr/>
+          <p:nvPr/>
+        </p:nvSpPr>
+        <p:spPr>
+          <a:xfrm>
+            <a:off x="5644008" y="3883853"/>
+            <a:ext cx="394839" cy="554456"/>
+          </a:xfrm>
+          <a:prstGeom prst="rect">
+            <a:avLst/>
+          </a:prstGeom>
+          <a:solidFill>
+            <a:schemeClr val="accent2">
+              <a:lumMod val="20000"/>
+              <a:lumOff val="80000"/>
+            </a:schemeClr>
+          </a:solidFill>
+          <a:ln>
+            <a:noFill/>
+          </a:ln>
+          <a:effectLst/>
+        </p:spPr>
+        <p:style>
+          <a:lnRef idx="2">
+            <a:schemeClr val="accent1">
+              <a:shade val="15000"/>
+            </a:schemeClr>
+          </a:lnRef>
+          <a:fillRef idx="1">
+            <a:schemeClr val="accent1"/>
+          </a:fillRef>
+          <a:effectRef idx="0">
+            <a:schemeClr val="accent1"/>
+          </a:effectRef>
+          <a:fontRef idx="minor">
+            <a:schemeClr val="lt1"/>
+          </a:fontRef>
+        </p:style>
+        <p:txBody>
+          <a:bodyPr rtlCol="0" anchor="ctr"/>
+          <a:lstStyle/>
+          <a:p>
+            <a:pPr algn="ctr"/>
+            <a:endParaRPr lang="en-US"/>
+          </a:p>
+        </p:txBody>
+      </p:sp>
       <p:grpSp>
         <p:nvGrpSpPr>
           <p:cNvPr id="7" name="Group 6">
@@ -3668,7 +4630,7 @@
         </p:nvGrpSpPr>
         <p:grpSpPr>
           <a:xfrm>
-            <a:off x="2293232" y="814389"/>
+            <a:off x="2675369" y="694255"/>
             <a:ext cx="6353175" cy="885825"/>
             <a:chOff x="1971675" y="447675"/>
             <a:chExt cx="6353175" cy="885825"/>
@@ -3845,8 +4807,8 @@
         </p:nvSpPr>
         <p:spPr>
           <a:xfrm>
-            <a:off x="5276146" y="1002908"/>
-            <a:ext cx="394839" cy="1721244"/>
+            <a:off x="5658283" y="908182"/>
+            <a:ext cx="394839" cy="1199960"/>
           </a:xfrm>
           <a:prstGeom prst="rect">
             <a:avLst/>
@@ -3889,10 +4851,10 @@
       </p:sp>
       <p:cxnSp>
         <p:nvCxnSpPr>
-          <p:cNvPr id="14" name="Straight Arrow Connector 13">
-            <a:extLst>
-              <a:ext uri="{FF2B5EF4-FFF2-40B4-BE49-F238E27FC236}">
-                <a16:creationId xmlns:a16="http://schemas.microsoft.com/office/drawing/2014/main" id="{70A54B4F-B66F-E88E-4AED-40FB9623733B}"/>
+          <p:cNvPr id="20" name="Straight Connector 19">
+            <a:extLst>
+              <a:ext uri="{FF2B5EF4-FFF2-40B4-BE49-F238E27FC236}">
+                <a16:creationId xmlns:a16="http://schemas.microsoft.com/office/drawing/2014/main" id="{1C5EF031-51AC-7DFE-E822-84EB8BB0A4B2}"/>
               </a:ext>
             </a:extLst>
           </p:cNvPr>
@@ -3903,91 +4865,7 @@
         </p:nvCxnSpPr>
         <p:spPr>
           <a:xfrm>
-            <a:off x="5457915" y="286943"/>
-            <a:ext cx="11903" cy="7447357"/>
-          </a:xfrm>
-          <a:prstGeom prst="straightConnector1">
-            <a:avLst/>
-          </a:prstGeom>
-          <a:ln>
-            <a:headEnd type="triangle" w="lg" len="lg"/>
-            <a:tailEnd type="none"/>
-          </a:ln>
-        </p:spPr>
-        <p:style>
-          <a:lnRef idx="2">
-            <a:schemeClr val="accent1"/>
-          </a:lnRef>
-          <a:fillRef idx="0">
-            <a:schemeClr val="accent1"/>
-          </a:fillRef>
-          <a:effectRef idx="1">
-            <a:schemeClr val="accent1"/>
-          </a:effectRef>
-          <a:fontRef idx="minor">
-            <a:schemeClr val="tx1"/>
-          </a:fontRef>
-        </p:style>
-      </p:cxnSp>
-      <p:cxnSp>
-        <p:nvCxnSpPr>
-          <p:cNvPr id="16" name="Straight Arrow Connector 15">
-            <a:extLst>
-              <a:ext uri="{FF2B5EF4-FFF2-40B4-BE49-F238E27FC236}">
-                <a16:creationId xmlns:a16="http://schemas.microsoft.com/office/drawing/2014/main" id="{6E0E2CFE-7737-4370-B074-57FEB118BA15}"/>
-              </a:ext>
-            </a:extLst>
-          </p:cNvPr>
-          <p:cNvCxnSpPr>
-            <a:cxnSpLocks/>
-          </p:cNvCxnSpPr>
-          <p:nvPr/>
-        </p:nvCxnSpPr>
-        <p:spPr>
-          <a:xfrm flipH="1">
-            <a:off x="2293233" y="4643436"/>
-            <a:ext cx="8329613" cy="2"/>
-          </a:xfrm>
-          <a:prstGeom prst="straightConnector1">
-            <a:avLst/>
-          </a:prstGeom>
-          <a:ln>
-            <a:headEnd type="triangle" w="lg" len="lg"/>
-            <a:tailEnd type="none"/>
-          </a:ln>
-        </p:spPr>
-        <p:style>
-          <a:lnRef idx="2">
-            <a:schemeClr val="accent1"/>
-          </a:lnRef>
-          <a:fillRef idx="0">
-            <a:schemeClr val="accent1"/>
-          </a:fillRef>
-          <a:effectRef idx="1">
-            <a:schemeClr val="accent1"/>
-          </a:effectRef>
-          <a:fontRef idx="minor">
-            <a:schemeClr val="tx1"/>
-          </a:fontRef>
-        </p:style>
-      </p:cxnSp>
-      <p:cxnSp>
-        <p:nvCxnSpPr>
-          <p:cNvPr id="20" name="Straight Connector 19">
-            <a:extLst>
-              <a:ext uri="{FF2B5EF4-FFF2-40B4-BE49-F238E27FC236}">
-                <a16:creationId xmlns:a16="http://schemas.microsoft.com/office/drawing/2014/main" id="{1C5EF031-51AC-7DFE-E822-84EB8BB0A4B2}"/>
-              </a:ext>
-            </a:extLst>
-          </p:cNvPr>
-          <p:cNvCxnSpPr>
-            <a:cxnSpLocks/>
-          </p:cNvCxnSpPr>
-          <p:nvPr/>
-        </p:nvCxnSpPr>
-        <p:spPr>
-          <a:xfrm>
-            <a:off x="5454578" y="1033462"/>
+            <a:off x="5836715" y="938736"/>
             <a:ext cx="0" cy="1081088"/>
           </a:xfrm>
           <a:prstGeom prst="line">
@@ -4031,7 +4909,7 @@
         </p:nvCxnSpPr>
         <p:spPr>
           <a:xfrm flipH="1">
-            <a:off x="4164895" y="2724150"/>
+            <a:off x="4547032" y="1943624"/>
             <a:ext cx="1304923" cy="0"/>
           </a:xfrm>
           <a:prstGeom prst="line">
@@ -4074,8 +4952,8 @@
         </p:nvCxnSpPr>
         <p:spPr>
           <a:xfrm flipH="1">
-            <a:off x="4164895" y="3457575"/>
-            <a:ext cx="1304923" cy="0"/>
+            <a:off x="4547032" y="2677049"/>
+            <a:ext cx="1220168" cy="0"/>
           </a:xfrm>
           <a:prstGeom prst="line">
             <a:avLst/>
@@ -4117,7 +4995,7 @@
         </p:nvCxnSpPr>
         <p:spPr>
           <a:xfrm flipH="1">
-            <a:off x="4164895" y="2724152"/>
+            <a:off x="4547032" y="1943626"/>
             <a:ext cx="1" cy="733425"/>
           </a:xfrm>
           <a:prstGeom prst="line">
@@ -4160,7 +5038,7 @@
         </p:nvCxnSpPr>
         <p:spPr>
           <a:xfrm>
-            <a:off x="5469817" y="3457575"/>
+            <a:off x="5851954" y="3794650"/>
             <a:ext cx="0" cy="590550"/>
           </a:xfrm>
           <a:prstGeom prst="line">
@@ -4205,7 +5083,7 @@
         </p:nvCxnSpPr>
         <p:spPr>
           <a:xfrm>
-            <a:off x="5461876" y="4048125"/>
+            <a:off x="5844013" y="4385200"/>
             <a:ext cx="656896" cy="1"/>
           </a:xfrm>
           <a:prstGeom prst="line">
@@ -4248,7 +5126,7 @@
         </p:nvCxnSpPr>
         <p:spPr>
           <a:xfrm flipV="1">
-            <a:off x="6987471" y="2852911"/>
+            <a:off x="7369608" y="3189986"/>
             <a:ext cx="0" cy="1790528"/>
           </a:xfrm>
           <a:prstGeom prst="line">
@@ -4287,14 +5165,14 @@
           <p:cNvCxnSpPr>
             <a:cxnSpLocks/>
             <a:stCxn id="53" idx="2"/>
-            <a:endCxn id="10" idx="0"/>
+            <a:endCxn id="32" idx="2"/>
           </p:cNvCxnSpPr>
           <p:nvPr/>
         </p:nvCxnSpPr>
         <p:spPr>
           <a:xfrm>
-            <a:off x="6933084" y="4643436"/>
-            <a:ext cx="2484850" cy="5"/>
+            <a:off x="7315221" y="4980511"/>
+            <a:ext cx="1119105" cy="163"/>
           </a:xfrm>
           <a:prstGeom prst="line">
             <a:avLst/>
@@ -4334,7 +5212,7 @@
         </p:nvSpPr>
         <p:spPr>
           <a:xfrm>
-            <a:off x="4964128" y="624526"/>
+            <a:off x="5346265" y="504392"/>
             <a:ext cx="441146" cy="369332"/>
           </a:xfrm>
           <a:prstGeom prst="rect">
@@ -4375,7 +5253,7 @@
         </p:nvSpPr>
         <p:spPr>
           <a:xfrm>
-            <a:off x="5402204" y="979837"/>
+            <a:off x="5784341" y="859703"/>
             <a:ext cx="108776" cy="108776"/>
           </a:xfrm>
           <a:prstGeom prst="ellipse">
@@ -4429,7 +5307,7 @@
         </p:nvSpPr>
         <p:spPr>
           <a:xfrm>
-            <a:off x="5415430" y="2672110"/>
+            <a:off x="5797567" y="1891584"/>
             <a:ext cx="108776" cy="108776"/>
           </a:xfrm>
           <a:prstGeom prst="ellipse">
@@ -4481,7 +5359,7 @@
         </p:nvSpPr>
         <p:spPr>
           <a:xfrm>
-            <a:off x="5489099" y="2374851"/>
+            <a:off x="5939787" y="1627791"/>
             <a:ext cx="441146" cy="369332"/>
           </a:xfrm>
           <a:prstGeom prst="rect">
@@ -4522,7 +5400,7 @@
         </p:nvSpPr>
         <p:spPr>
           <a:xfrm>
-            <a:off x="4110506" y="2672110"/>
+            <a:off x="4492643" y="1891584"/>
             <a:ext cx="108776" cy="108776"/>
           </a:xfrm>
           <a:prstGeom prst="ellipse">
@@ -4576,7 +5454,7 @@
         </p:nvSpPr>
         <p:spPr>
           <a:xfrm>
-            <a:off x="4110506" y="3403187"/>
+            <a:off x="4492643" y="2622661"/>
             <a:ext cx="108776" cy="108776"/>
           </a:xfrm>
           <a:prstGeom prst="ellipse">
@@ -4630,7 +5508,7 @@
         </p:nvSpPr>
         <p:spPr>
           <a:xfrm>
-            <a:off x="5415430" y="3403187"/>
+            <a:off x="5720970" y="2614778"/>
             <a:ext cx="108776" cy="108776"/>
           </a:xfrm>
           <a:prstGeom prst="ellipse">
@@ -4684,7 +5562,7 @@
         </p:nvSpPr>
         <p:spPr>
           <a:xfrm>
-            <a:off x="5413051" y="3993738"/>
+            <a:off x="5795188" y="4330813"/>
             <a:ext cx="108776" cy="108776"/>
           </a:xfrm>
           <a:prstGeom prst="ellipse">
@@ -4738,7 +5616,7 @@
         </p:nvSpPr>
         <p:spPr>
           <a:xfrm>
-            <a:off x="6118772" y="3993738"/>
+            <a:off x="6500909" y="4330813"/>
             <a:ext cx="108776" cy="108776"/>
           </a:xfrm>
           <a:prstGeom prst="ellipse">
@@ -4792,7 +5670,7 @@
         </p:nvSpPr>
         <p:spPr>
           <a:xfrm>
-            <a:off x="6931775" y="2798237"/>
+            <a:off x="7313912" y="3135312"/>
             <a:ext cx="108776" cy="108776"/>
           </a:xfrm>
           <a:prstGeom prst="ellipse">
@@ -4846,7 +5724,7 @@
         </p:nvSpPr>
         <p:spPr>
           <a:xfrm>
-            <a:off x="6933084" y="4589048"/>
+            <a:off x="7315221" y="4926123"/>
             <a:ext cx="108776" cy="108776"/>
           </a:xfrm>
           <a:prstGeom prst="ellipse">
@@ -4900,7 +5778,7 @@
         </p:nvSpPr>
         <p:spPr>
           <a:xfrm>
-            <a:off x="9363545" y="4589048"/>
+            <a:off x="10632174" y="4926123"/>
             <a:ext cx="108776" cy="108776"/>
           </a:xfrm>
           <a:prstGeom prst="ellipse">
@@ -4952,7 +5830,7 @@
         </p:nvSpPr>
         <p:spPr>
           <a:xfrm>
-            <a:off x="3475981" y="2512846"/>
+            <a:off x="3983616" y="1717160"/>
             <a:ext cx="441146" cy="369332"/>
           </a:xfrm>
           <a:prstGeom prst="rect">
@@ -4991,7 +5869,7 @@
         </p:nvSpPr>
         <p:spPr>
           <a:xfrm>
-            <a:off x="3652136" y="3554811"/>
+            <a:off x="4016150" y="2444344"/>
             <a:ext cx="441146" cy="369332"/>
           </a:xfrm>
           <a:prstGeom prst="rect">
@@ -5030,7 +5908,7 @@
         </p:nvSpPr>
         <p:spPr>
           <a:xfrm>
-            <a:off x="5528993" y="3032471"/>
+            <a:off x="5958984" y="2465394"/>
             <a:ext cx="441146" cy="369332"/>
           </a:xfrm>
           <a:prstGeom prst="rect">
@@ -5069,7 +5947,7 @@
         </p:nvSpPr>
         <p:spPr>
           <a:xfrm>
-            <a:off x="4900593" y="3762096"/>
+            <a:off x="5858904" y="3117900"/>
             <a:ext cx="441146" cy="369332"/>
           </a:xfrm>
           <a:prstGeom prst="rect">
@@ -5108,8 +5986,8 @@
         </p:nvSpPr>
         <p:spPr>
           <a:xfrm>
-            <a:off x="6125440" y="4151563"/>
-            <a:ext cx="441146" cy="369332"/>
+            <a:off x="6507577" y="4488638"/>
+            <a:ext cx="564578" cy="369332"/>
           </a:xfrm>
           <a:prstGeom prst="rect">
             <a:avLst/>
@@ -5128,7 +6006,7 @@
           <a:p>
             <a:r>
               <a:rPr lang="en-US" dirty="0"/>
-              <a:t>P7</a:t>
+              <a:t>P11</a:t>
             </a:r>
           </a:p>
         </p:txBody>
@@ -5147,8 +6025,8 @@
         </p:nvSpPr>
         <p:spPr>
           <a:xfrm>
-            <a:off x="5995113" y="2389480"/>
-            <a:ext cx="441146" cy="369332"/>
+            <a:off x="6377250" y="2726555"/>
+            <a:ext cx="564578" cy="369332"/>
           </a:xfrm>
           <a:prstGeom prst="rect">
             <a:avLst/>
@@ -5167,7 +6045,7 @@
           <a:p>
             <a:r>
               <a:rPr lang="en-US" dirty="0"/>
-              <a:t>P8</a:t>
+              <a:t>P12</a:t>
             </a:r>
           </a:p>
         </p:txBody>
@@ -5186,8 +6064,8 @@
         </p:nvSpPr>
         <p:spPr>
           <a:xfrm>
-            <a:off x="7014166" y="2397622"/>
-            <a:ext cx="441146" cy="369332"/>
+            <a:off x="7396303" y="2734697"/>
+            <a:ext cx="564578" cy="369332"/>
           </a:xfrm>
           <a:prstGeom prst="rect">
             <a:avLst/>
@@ -5206,7 +6084,7 @@
           <a:p>
             <a:r>
               <a:rPr lang="en-US" dirty="0"/>
-              <a:t>P9</a:t>
+              <a:t>P13</a:t>
             </a:r>
           </a:p>
         </p:txBody>
@@ -5225,7 +6103,7 @@
         </p:nvSpPr>
         <p:spPr>
           <a:xfrm>
-            <a:off x="6625288" y="4821531"/>
+            <a:off x="7007425" y="5158606"/>
             <a:ext cx="564578" cy="369332"/>
           </a:xfrm>
           <a:prstGeom prst="rect">
@@ -5245,7 +6123,7 @@
           <a:p>
             <a:r>
               <a:rPr lang="en-US" dirty="0"/>
-              <a:t>P10</a:t>
+              <a:t>P14</a:t>
             </a:r>
           </a:p>
         </p:txBody>
@@ -5264,7 +6142,7 @@
         </p:nvCxnSpPr>
         <p:spPr>
           <a:xfrm>
-            <a:off x="3475980" y="1033462"/>
+            <a:off x="7352804" y="938122"/>
             <a:ext cx="0" cy="457200"/>
           </a:xfrm>
           <a:prstGeom prst="straightConnector1">
@@ -5306,7 +6184,7 @@
         </p:nvCxnSpPr>
         <p:spPr>
           <a:xfrm>
-            <a:off x="2750431" y="640400"/>
+            <a:off x="3132568" y="520266"/>
             <a:ext cx="5338761" cy="0"/>
           </a:xfrm>
           <a:prstGeom prst="straightConnector1">
@@ -5346,7 +6224,7 @@
         </p:nvSpPr>
         <p:spPr>
           <a:xfrm>
-            <a:off x="7082815" y="297776"/>
+            <a:off x="7464952" y="177642"/>
             <a:ext cx="723275" cy="369332"/>
           </a:xfrm>
           <a:prstGeom prst="rect">
@@ -5388,7 +6266,7 @@
         </p:nvCxnSpPr>
         <p:spPr>
           <a:xfrm flipV="1">
-            <a:off x="8044683" y="1252537"/>
+            <a:off x="2904817" y="1278435"/>
             <a:ext cx="0" cy="3388131"/>
           </a:xfrm>
           <a:prstGeom prst="straightConnector1">
@@ -5431,7 +6309,7 @@
         </p:nvCxnSpPr>
         <p:spPr>
           <a:xfrm>
-            <a:off x="2750432" y="1262062"/>
+            <a:off x="3132569" y="1141928"/>
             <a:ext cx="5438775" cy="0"/>
           </a:xfrm>
           <a:prstGeom prst="line">
@@ -5475,7 +6353,7 @@
         </p:nvSpPr>
         <p:spPr>
           <a:xfrm>
-            <a:off x="8140290" y="2672142"/>
+            <a:off x="2285207" y="2655239"/>
             <a:ext cx="314510" cy="369332"/>
           </a:xfrm>
           <a:prstGeom prst="rect">
@@ -5514,7 +6392,7 @@
         </p:nvSpPr>
         <p:spPr>
           <a:xfrm>
-            <a:off x="3603906" y="1079663"/>
+            <a:off x="7480730" y="984323"/>
             <a:ext cx="830677" cy="369332"/>
           </a:xfrm>
           <a:prstGeom prst="rect">
@@ -5556,7 +6434,7 @@
         </p:nvCxnSpPr>
         <p:spPr>
           <a:xfrm rot="5400000">
-            <a:off x="5468218" y="1023937"/>
+            <a:off x="5850355" y="903803"/>
             <a:ext cx="0" cy="457200"/>
           </a:xfrm>
           <a:prstGeom prst="straightConnector1">
@@ -5596,7 +6474,7 @@
         </p:nvSpPr>
         <p:spPr>
           <a:xfrm>
-            <a:off x="5545995" y="722697"/>
+            <a:off x="5928132" y="602563"/>
             <a:ext cx="830677" cy="369332"/>
           </a:xfrm>
           <a:prstGeom prst="rect">
@@ -5638,7 +6516,7 @@
         </p:nvSpPr>
         <p:spPr>
           <a:xfrm>
-            <a:off x="6116055" y="2810335"/>
+            <a:off x="6498192" y="3147410"/>
             <a:ext cx="108776" cy="108776"/>
           </a:xfrm>
           <a:prstGeom prst="ellipse">
@@ -5690,7 +6568,7 @@
         </p:nvSpPr>
         <p:spPr>
           <a:xfrm>
-            <a:off x="9363545" y="4175612"/>
+            <a:off x="10686562" y="4521695"/>
             <a:ext cx="564578" cy="369332"/>
           </a:xfrm>
           <a:prstGeom prst="rect">
@@ -5710,7 +6588,7 @@
           <a:p>
             <a:r>
               <a:rPr lang="en-US" dirty="0"/>
-              <a:t>P11</a:t>
+              <a:t>P19</a:t>
             </a:r>
           </a:p>
         </p:txBody>
@@ -5729,8 +6607,8 @@
         </p:nvSpPr>
         <p:spPr>
           <a:xfrm>
-            <a:off x="3421086" y="1987614"/>
-            <a:ext cx="1931939" cy="369332"/>
+            <a:off x="4844525" y="1283576"/>
+            <a:ext cx="473206" cy="369332"/>
           </a:xfrm>
           <a:prstGeom prst="rect">
             <a:avLst/>
@@ -5749,7 +6627,7 @@
           <a:p>
             <a:r>
               <a:rPr lang="en-US" dirty="0"/>
-              <a:t>l_1_segment_TTD</a:t>
+              <a:t>l_1</a:t>
             </a:r>
           </a:p>
         </p:txBody>
@@ -5770,7 +6648,7 @@
         </p:nvCxnSpPr>
         <p:spPr>
           <a:xfrm flipH="1">
-            <a:off x="4110506" y="2425049"/>
+            <a:off x="4342317" y="1627675"/>
             <a:ext cx="1344072" cy="0"/>
           </a:xfrm>
           <a:prstGeom prst="straightConnector1">
@@ -5810,8 +6688,8 @@
         </p:nvSpPr>
         <p:spPr>
           <a:xfrm>
-            <a:off x="1481567" y="2923319"/>
-            <a:ext cx="1931939" cy="369332"/>
+            <a:off x="3199765" y="2133362"/>
+            <a:ext cx="473206" cy="369332"/>
           </a:xfrm>
           <a:prstGeom prst="rect">
             <a:avLst/>
@@ -5830,7 +6708,7 @@
           <a:p>
             <a:r>
               <a:rPr lang="en-US" dirty="0"/>
-              <a:t>l_2_segment_TTD</a:t>
+              <a:t>l_2</a:t>
             </a:r>
           </a:p>
         </p:txBody>
@@ -5851,7 +6729,7 @@
         </p:nvCxnSpPr>
         <p:spPr>
           <a:xfrm flipV="1">
-            <a:off x="3493534" y="2767357"/>
+            <a:off x="3875671" y="1986831"/>
             <a:ext cx="0" cy="731317"/>
           </a:xfrm>
           <a:prstGeom prst="straightConnector1">
@@ -5891,7 +6769,7 @@
         </p:nvSpPr>
         <p:spPr>
           <a:xfrm>
-            <a:off x="10333984" y="4708516"/>
+            <a:off x="10716121" y="5045591"/>
             <a:ext cx="288862" cy="369332"/>
           </a:xfrm>
           <a:prstGeom prst="rect">
@@ -5926,7 +6804,7 @@
         </p:nvSpPr>
         <p:spPr>
           <a:xfrm>
-            <a:off x="5040270" y="120134"/>
+            <a:off x="5422407" y="0"/>
             <a:ext cx="287258" cy="369332"/>
           </a:xfrm>
           <a:prstGeom prst="rect">
@@ -5963,7 +6841,7 @@
         </p:nvCxnSpPr>
         <p:spPr>
           <a:xfrm flipV="1">
-            <a:off x="5454578" y="4033836"/>
+            <a:off x="5836715" y="4370911"/>
             <a:ext cx="0" cy="663988"/>
           </a:xfrm>
           <a:prstGeom prst="straightConnector1">
@@ -6003,7 +6881,7 @@
         </p:nvSpPr>
         <p:spPr>
           <a:xfrm>
-            <a:off x="4367553" y="4203911"/>
+            <a:off x="5880251" y="4794133"/>
             <a:ext cx="1045927" cy="369332"/>
           </a:xfrm>
           <a:prstGeom prst="rect">
@@ -6045,7 +6923,7 @@
         </p:nvCxnSpPr>
         <p:spPr>
           <a:xfrm rot="16200000" flipV="1">
-            <a:off x="5828888" y="3372471"/>
+            <a:off x="6211025" y="3709546"/>
             <a:ext cx="0" cy="663988"/>
           </a:xfrm>
           <a:prstGeom prst="straightConnector1">
@@ -6087,7 +6965,7 @@
         </p:nvCxnSpPr>
         <p:spPr>
           <a:xfrm flipV="1">
-            <a:off x="6150179" y="2852911"/>
+            <a:off x="6532316" y="3189986"/>
             <a:ext cx="852709" cy="0"/>
           </a:xfrm>
           <a:prstGeom prst="line">
@@ -6128,8 +7006,8 @@
         </p:nvSpPr>
         <p:spPr>
           <a:xfrm>
-            <a:off x="5766069" y="1757832"/>
-            <a:ext cx="1931939" cy="369332"/>
+            <a:off x="6778578" y="2253329"/>
+            <a:ext cx="473206" cy="369332"/>
           </a:xfrm>
           <a:prstGeom prst="rect">
             <a:avLst/>
@@ -6148,7 +7026,7 @@
           <a:p>
             <a:r>
               <a:rPr lang="en-US" dirty="0"/>
-              <a:t>l_3_segment_TTD</a:t>
+              <a:t>l_3</a:t>
             </a:r>
           </a:p>
         </p:txBody>
@@ -6169,7 +7047,7 @@
         </p:nvCxnSpPr>
         <p:spPr>
           <a:xfrm rot="5400000" flipH="1">
-            <a:off x="6665858" y="3498674"/>
+            <a:off x="7047995" y="3835749"/>
             <a:ext cx="1344072" cy="0"/>
           </a:xfrm>
           <a:prstGeom prst="straightConnector1">
@@ -6209,8 +7087,8 @@
         </p:nvSpPr>
         <p:spPr>
           <a:xfrm rot="16200000">
-            <a:off x="6730436" y="3230740"/>
-            <a:ext cx="1931939" cy="369332"/>
+            <a:off x="7745688" y="3567815"/>
+            <a:ext cx="473206" cy="369332"/>
           </a:xfrm>
           <a:prstGeom prst="rect">
             <a:avLst/>
@@ -6229,7 +7107,7 @@
           <a:p>
             <a:r>
               <a:rPr lang="en-US" dirty="0"/>
-              <a:t>l_4_segment_TTD</a:t>
+              <a:t>l_4</a:t>
             </a:r>
           </a:p>
         </p:txBody>
@@ -6250,7 +7128,7 @@
         </p:nvCxnSpPr>
         <p:spPr>
           <a:xfrm rot="5400000" flipV="1">
-            <a:off x="6605342" y="1961968"/>
+            <a:off x="6987479" y="2299043"/>
             <a:ext cx="0" cy="731317"/>
           </a:xfrm>
           <a:prstGeom prst="straightConnector1">
@@ -6294,7 +7172,7 @@
         </p:nvCxnSpPr>
         <p:spPr>
           <a:xfrm>
-            <a:off x="6170443" y="2919111"/>
+            <a:off x="6552580" y="3256186"/>
             <a:ext cx="2717" cy="1074627"/>
           </a:xfrm>
           <a:prstGeom prst="line">
@@ -6335,7 +7213,7 @@
         </p:nvSpPr>
         <p:spPr>
           <a:xfrm>
-            <a:off x="5732750" y="3367146"/>
+            <a:off x="6114887" y="3704221"/>
             <a:ext cx="1045927" cy="369332"/>
           </a:xfrm>
           <a:prstGeom prst="rect">
@@ -6357,6 +7235,988 @@
           </a:p>
         </p:txBody>
       </p:sp>
+      <p:sp>
+        <p:nvSpPr>
+          <p:cNvPr id="8" name="TextBox 7">
+            <a:extLst>
+              <a:ext uri="{FF2B5EF4-FFF2-40B4-BE49-F238E27FC236}">
+                <a16:creationId xmlns:a16="http://schemas.microsoft.com/office/drawing/2014/main" id="{43A3A96A-D0A7-2BF8-7EDA-46BCED3C4727}"/>
+              </a:ext>
+            </a:extLst>
+          </p:cNvPr>
+          <p:cNvSpPr txBox="1"/>
+          <p:nvPr/>
+        </p:nvSpPr>
+        <p:spPr>
+          <a:xfrm>
+            <a:off x="8205771" y="5206047"/>
+            <a:ext cx="564578" cy="369332"/>
+          </a:xfrm>
+          <a:prstGeom prst="rect">
+            <a:avLst/>
+          </a:prstGeom>
+          <a:solidFill>
+            <a:schemeClr val="bg1">
+              <a:alpha val="53000"/>
+            </a:schemeClr>
+          </a:solidFill>
+        </p:spPr>
+        <p:txBody>
+          <a:bodyPr wrap="none" rtlCol="0">
+            <a:spAutoFit/>
+          </a:bodyPr>
+          <a:lstStyle/>
+          <a:p>
+            <a:r>
+              <a:rPr lang="en-US" dirty="0"/>
+              <a:t>P15</a:t>
+            </a:r>
+          </a:p>
+        </p:txBody>
+      </p:sp>
+      <p:cxnSp>
+        <p:nvCxnSpPr>
+          <p:cNvPr id="13" name="Straight Connector 12">
+            <a:extLst>
+              <a:ext uri="{FF2B5EF4-FFF2-40B4-BE49-F238E27FC236}">
+                <a16:creationId xmlns:a16="http://schemas.microsoft.com/office/drawing/2014/main" id="{018FBFB9-9E35-B67D-2250-78E92F27AB4F}"/>
+              </a:ext>
+            </a:extLst>
+          </p:cNvPr>
+          <p:cNvCxnSpPr>
+            <a:cxnSpLocks/>
+          </p:cNvCxnSpPr>
+          <p:nvPr/>
+        </p:nvCxnSpPr>
+        <p:spPr>
+          <a:xfrm flipV="1">
+            <a:off x="8489310" y="3305870"/>
+            <a:ext cx="0" cy="1630537"/>
+          </a:xfrm>
+          <a:prstGeom prst="line">
+            <a:avLst/>
+          </a:prstGeom>
+          <a:ln w="38100">
+            <a:solidFill>
+              <a:schemeClr val="accent2"/>
+            </a:solidFill>
+          </a:ln>
+        </p:spPr>
+        <p:style>
+          <a:lnRef idx="2">
+            <a:schemeClr val="accent1"/>
+          </a:lnRef>
+          <a:fillRef idx="0">
+            <a:schemeClr val="accent1"/>
+          </a:fillRef>
+          <a:effectRef idx="1">
+            <a:schemeClr val="accent1"/>
+          </a:effectRef>
+          <a:fontRef idx="minor">
+            <a:schemeClr val="tx1"/>
+          </a:fontRef>
+        </p:style>
+      </p:cxnSp>
+      <p:cxnSp>
+        <p:nvCxnSpPr>
+          <p:cNvPr id="18" name="Straight Connector 17">
+            <a:extLst>
+              <a:ext uri="{FF2B5EF4-FFF2-40B4-BE49-F238E27FC236}">
+                <a16:creationId xmlns:a16="http://schemas.microsoft.com/office/drawing/2014/main" id="{6B1ECEFD-4702-F3BD-9C7B-4337F591660B}"/>
+              </a:ext>
+            </a:extLst>
+          </p:cNvPr>
+          <p:cNvCxnSpPr>
+            <a:cxnSpLocks/>
+          </p:cNvCxnSpPr>
+          <p:nvPr/>
+        </p:nvCxnSpPr>
+        <p:spPr>
+          <a:xfrm flipV="1">
+            <a:off x="9028544" y="3322295"/>
+            <a:ext cx="0" cy="1630537"/>
+          </a:xfrm>
+          <a:prstGeom prst="line">
+            <a:avLst/>
+          </a:prstGeom>
+          <a:ln w="38100">
+            <a:solidFill>
+              <a:schemeClr val="accent2"/>
+            </a:solidFill>
+          </a:ln>
+        </p:spPr>
+        <p:style>
+          <a:lnRef idx="2">
+            <a:schemeClr val="accent1"/>
+          </a:lnRef>
+          <a:fillRef idx="0">
+            <a:schemeClr val="accent1"/>
+          </a:fillRef>
+          <a:effectRef idx="1">
+            <a:schemeClr val="accent1"/>
+          </a:effectRef>
+          <a:fontRef idx="minor">
+            <a:schemeClr val="tx1"/>
+          </a:fontRef>
+        </p:style>
+      </p:cxnSp>
+      <p:cxnSp>
+        <p:nvCxnSpPr>
+          <p:cNvPr id="19" name="Straight Connector 18">
+            <a:extLst>
+              <a:ext uri="{FF2B5EF4-FFF2-40B4-BE49-F238E27FC236}">
+                <a16:creationId xmlns:a16="http://schemas.microsoft.com/office/drawing/2014/main" id="{6E8383B8-3452-FB2C-5275-D33E605CC139}"/>
+              </a:ext>
+            </a:extLst>
+          </p:cNvPr>
+          <p:cNvCxnSpPr>
+            <a:cxnSpLocks/>
+          </p:cNvCxnSpPr>
+          <p:nvPr/>
+        </p:nvCxnSpPr>
+        <p:spPr>
+          <a:xfrm>
+            <a:off x="8463960" y="3295026"/>
+            <a:ext cx="564584" cy="0"/>
+          </a:xfrm>
+          <a:prstGeom prst="line">
+            <a:avLst/>
+          </a:prstGeom>
+          <a:ln w="38100">
+            <a:solidFill>
+              <a:schemeClr val="accent2"/>
+            </a:solidFill>
+          </a:ln>
+        </p:spPr>
+        <p:style>
+          <a:lnRef idx="2">
+            <a:schemeClr val="accent1"/>
+          </a:lnRef>
+          <a:fillRef idx="0">
+            <a:schemeClr val="accent1"/>
+          </a:fillRef>
+          <a:effectRef idx="1">
+            <a:schemeClr val="accent1"/>
+          </a:effectRef>
+          <a:fontRef idx="minor">
+            <a:schemeClr val="tx1"/>
+          </a:fontRef>
+        </p:style>
+      </p:cxnSp>
+      <p:sp>
+        <p:nvSpPr>
+          <p:cNvPr id="24" name="Oval 23">
+            <a:extLst>
+              <a:ext uri="{FF2B5EF4-FFF2-40B4-BE49-F238E27FC236}">
+                <a16:creationId xmlns:a16="http://schemas.microsoft.com/office/drawing/2014/main" id="{11A0A2F1-5BAD-1BD1-10E4-EA897AF19754}"/>
+              </a:ext>
+            </a:extLst>
+          </p:cNvPr>
+          <p:cNvSpPr>
+            <a:spLocks noChangeAspect="1"/>
+          </p:cNvSpPr>
+          <p:nvPr/>
+        </p:nvSpPr>
+        <p:spPr>
+          <a:xfrm>
+            <a:off x="8434326" y="3246135"/>
+            <a:ext cx="108776" cy="108776"/>
+          </a:xfrm>
+          <a:prstGeom prst="ellipse">
+            <a:avLst/>
+          </a:prstGeom>
+          <a:solidFill>
+            <a:schemeClr val="accent2"/>
+          </a:solidFill>
+          <a:ln>
+            <a:noFill/>
+          </a:ln>
+        </p:spPr>
+        <p:style>
+          <a:lnRef idx="2">
+            <a:schemeClr val="accent1">
+              <a:shade val="15000"/>
+            </a:schemeClr>
+          </a:lnRef>
+          <a:fillRef idx="1">
+            <a:schemeClr val="accent1"/>
+          </a:fillRef>
+          <a:effectRef idx="0">
+            <a:schemeClr val="accent1"/>
+          </a:effectRef>
+          <a:fontRef idx="minor">
+            <a:schemeClr val="lt1"/>
+          </a:fontRef>
+        </p:style>
+        <p:txBody>
+          <a:bodyPr rtlCol="0" anchor="ctr"/>
+          <a:lstStyle/>
+          <a:p>
+            <a:pPr algn="ctr"/>
+            <a:endParaRPr lang="en-US"/>
+          </a:p>
+        </p:txBody>
+      </p:sp>
+      <p:sp>
+        <p:nvSpPr>
+          <p:cNvPr id="28" name="Oval 27">
+            <a:extLst>
+              <a:ext uri="{FF2B5EF4-FFF2-40B4-BE49-F238E27FC236}">
+                <a16:creationId xmlns:a16="http://schemas.microsoft.com/office/drawing/2014/main" id="{1B6ED187-AD4A-DD32-5BAC-34533635770F}"/>
+              </a:ext>
+            </a:extLst>
+          </p:cNvPr>
+          <p:cNvSpPr>
+            <a:spLocks noChangeAspect="1"/>
+          </p:cNvSpPr>
+          <p:nvPr/>
+        </p:nvSpPr>
+        <p:spPr>
+          <a:xfrm>
+            <a:off x="8974752" y="3238821"/>
+            <a:ext cx="108776" cy="108776"/>
+          </a:xfrm>
+          <a:prstGeom prst="ellipse">
+            <a:avLst/>
+          </a:prstGeom>
+          <a:solidFill>
+            <a:schemeClr val="accent2"/>
+          </a:solidFill>
+          <a:ln>
+            <a:noFill/>
+          </a:ln>
+        </p:spPr>
+        <p:style>
+          <a:lnRef idx="2">
+            <a:schemeClr val="accent1">
+              <a:shade val="15000"/>
+            </a:schemeClr>
+          </a:lnRef>
+          <a:fillRef idx="1">
+            <a:schemeClr val="accent1"/>
+          </a:fillRef>
+          <a:effectRef idx="0">
+            <a:schemeClr val="accent1"/>
+          </a:effectRef>
+          <a:fontRef idx="minor">
+            <a:schemeClr val="lt1"/>
+          </a:fontRef>
+        </p:style>
+        <p:txBody>
+          <a:bodyPr rtlCol="0" anchor="ctr"/>
+          <a:lstStyle/>
+          <a:p>
+            <a:pPr algn="ctr"/>
+            <a:endParaRPr lang="en-US"/>
+          </a:p>
+        </p:txBody>
+      </p:sp>
+      <p:sp>
+        <p:nvSpPr>
+          <p:cNvPr id="32" name="Oval 31">
+            <a:extLst>
+              <a:ext uri="{FF2B5EF4-FFF2-40B4-BE49-F238E27FC236}">
+                <a16:creationId xmlns:a16="http://schemas.microsoft.com/office/drawing/2014/main" id="{B6D67F48-41E3-8F21-9859-F31B5703AE4B}"/>
+              </a:ext>
+            </a:extLst>
+          </p:cNvPr>
+          <p:cNvSpPr>
+            <a:spLocks noChangeAspect="1"/>
+          </p:cNvSpPr>
+          <p:nvPr/>
+        </p:nvSpPr>
+        <p:spPr>
+          <a:xfrm>
+            <a:off x="8434326" y="4926286"/>
+            <a:ext cx="108776" cy="108776"/>
+          </a:xfrm>
+          <a:prstGeom prst="ellipse">
+            <a:avLst/>
+          </a:prstGeom>
+          <a:solidFill>
+            <a:schemeClr val="accent2"/>
+          </a:solidFill>
+          <a:ln>
+            <a:noFill/>
+          </a:ln>
+        </p:spPr>
+        <p:style>
+          <a:lnRef idx="2">
+            <a:schemeClr val="accent1">
+              <a:shade val="15000"/>
+            </a:schemeClr>
+          </a:lnRef>
+          <a:fillRef idx="1">
+            <a:schemeClr val="accent1"/>
+          </a:fillRef>
+          <a:effectRef idx="0">
+            <a:schemeClr val="accent1"/>
+          </a:effectRef>
+          <a:fontRef idx="minor">
+            <a:schemeClr val="lt1"/>
+          </a:fontRef>
+        </p:style>
+        <p:txBody>
+          <a:bodyPr rtlCol="0" anchor="ctr"/>
+          <a:lstStyle/>
+          <a:p>
+            <a:pPr algn="ctr"/>
+            <a:endParaRPr lang="en-US"/>
+          </a:p>
+        </p:txBody>
+      </p:sp>
+      <p:sp>
+        <p:nvSpPr>
+          <p:cNvPr id="34" name="Oval 33">
+            <a:extLst>
+              <a:ext uri="{FF2B5EF4-FFF2-40B4-BE49-F238E27FC236}">
+                <a16:creationId xmlns:a16="http://schemas.microsoft.com/office/drawing/2014/main" id="{66440714-4212-688A-FEE0-3132DBF83249}"/>
+              </a:ext>
+            </a:extLst>
+          </p:cNvPr>
+          <p:cNvSpPr>
+            <a:spLocks noChangeAspect="1"/>
+          </p:cNvSpPr>
+          <p:nvPr/>
+        </p:nvSpPr>
+        <p:spPr>
+          <a:xfrm>
+            <a:off x="8974752" y="4918321"/>
+            <a:ext cx="108776" cy="108776"/>
+          </a:xfrm>
+          <a:prstGeom prst="ellipse">
+            <a:avLst/>
+          </a:prstGeom>
+          <a:solidFill>
+            <a:schemeClr val="accent2"/>
+          </a:solidFill>
+          <a:ln>
+            <a:noFill/>
+          </a:ln>
+        </p:spPr>
+        <p:style>
+          <a:lnRef idx="2">
+            <a:schemeClr val="accent1">
+              <a:shade val="15000"/>
+            </a:schemeClr>
+          </a:lnRef>
+          <a:fillRef idx="1">
+            <a:schemeClr val="accent1"/>
+          </a:fillRef>
+          <a:effectRef idx="0">
+            <a:schemeClr val="accent1"/>
+          </a:effectRef>
+          <a:fontRef idx="minor">
+            <a:schemeClr val="lt1"/>
+          </a:fontRef>
+        </p:style>
+        <p:txBody>
+          <a:bodyPr rtlCol="0" anchor="ctr"/>
+          <a:lstStyle/>
+          <a:p>
+            <a:pPr algn="ctr"/>
+            <a:endParaRPr lang="en-US"/>
+          </a:p>
+        </p:txBody>
+      </p:sp>
+      <p:sp>
+        <p:nvSpPr>
+          <p:cNvPr id="62" name="TextBox 61">
+            <a:extLst>
+              <a:ext uri="{FF2B5EF4-FFF2-40B4-BE49-F238E27FC236}">
+                <a16:creationId xmlns:a16="http://schemas.microsoft.com/office/drawing/2014/main" id="{8B2FBA2D-110B-DFC9-8C34-D867513F3558}"/>
+              </a:ext>
+            </a:extLst>
+          </p:cNvPr>
+          <p:cNvSpPr txBox="1"/>
+          <p:nvPr/>
+        </p:nvSpPr>
+        <p:spPr>
+          <a:xfrm>
+            <a:off x="8205771" y="2746451"/>
+            <a:ext cx="564578" cy="369332"/>
+          </a:xfrm>
+          <a:prstGeom prst="rect">
+            <a:avLst/>
+          </a:prstGeom>
+          <a:solidFill>
+            <a:schemeClr val="bg1">
+              <a:alpha val="53000"/>
+            </a:schemeClr>
+          </a:solidFill>
+        </p:spPr>
+        <p:txBody>
+          <a:bodyPr wrap="none" rtlCol="0">
+            <a:spAutoFit/>
+          </a:bodyPr>
+          <a:lstStyle/>
+          <a:p>
+            <a:r>
+              <a:rPr lang="en-US" dirty="0"/>
+              <a:t>P16</a:t>
+            </a:r>
+          </a:p>
+        </p:txBody>
+      </p:sp>
+      <p:sp>
+        <p:nvSpPr>
+          <p:cNvPr id="68" name="TextBox 67">
+            <a:extLst>
+              <a:ext uri="{FF2B5EF4-FFF2-40B4-BE49-F238E27FC236}">
+                <a16:creationId xmlns:a16="http://schemas.microsoft.com/office/drawing/2014/main" id="{2049108A-1BCA-890F-4C28-400930B8B33E}"/>
+              </a:ext>
+            </a:extLst>
+          </p:cNvPr>
+          <p:cNvSpPr txBox="1"/>
+          <p:nvPr/>
+        </p:nvSpPr>
+        <p:spPr>
+          <a:xfrm>
+            <a:off x="8856382" y="2754458"/>
+            <a:ext cx="564578" cy="369332"/>
+          </a:xfrm>
+          <a:prstGeom prst="rect">
+            <a:avLst/>
+          </a:prstGeom>
+          <a:solidFill>
+            <a:schemeClr val="bg1">
+              <a:alpha val="53000"/>
+            </a:schemeClr>
+          </a:solidFill>
+        </p:spPr>
+        <p:txBody>
+          <a:bodyPr wrap="none" rtlCol="0">
+            <a:spAutoFit/>
+          </a:bodyPr>
+          <a:lstStyle/>
+          <a:p>
+            <a:r>
+              <a:rPr lang="en-US" dirty="0"/>
+              <a:t>P17</a:t>
+            </a:r>
+          </a:p>
+        </p:txBody>
+      </p:sp>
+      <p:sp>
+        <p:nvSpPr>
+          <p:cNvPr id="95" name="TextBox 94">
+            <a:extLst>
+              <a:ext uri="{FF2B5EF4-FFF2-40B4-BE49-F238E27FC236}">
+                <a16:creationId xmlns:a16="http://schemas.microsoft.com/office/drawing/2014/main" id="{C313BA80-B350-7049-561F-14DCCE1D93A5}"/>
+              </a:ext>
+            </a:extLst>
+          </p:cNvPr>
+          <p:cNvSpPr txBox="1"/>
+          <p:nvPr/>
+        </p:nvSpPr>
+        <p:spPr>
+          <a:xfrm>
+            <a:off x="8606265" y="2185413"/>
+            <a:ext cx="473206" cy="369332"/>
+          </a:xfrm>
+          <a:prstGeom prst="rect">
+            <a:avLst/>
+          </a:prstGeom>
+          <a:solidFill>
+            <a:schemeClr val="bg1">
+              <a:alpha val="53000"/>
+            </a:schemeClr>
+          </a:solidFill>
+        </p:spPr>
+        <p:txBody>
+          <a:bodyPr wrap="none" rtlCol="0">
+            <a:spAutoFit/>
+          </a:bodyPr>
+          <a:lstStyle/>
+          <a:p>
+            <a:r>
+              <a:rPr lang="en-US" dirty="0"/>
+              <a:t>l_5</a:t>
+            </a:r>
+          </a:p>
+        </p:txBody>
+      </p:sp>
+      <p:cxnSp>
+        <p:nvCxnSpPr>
+          <p:cNvPr id="97" name="Straight Arrow Connector 96">
+            <a:extLst>
+              <a:ext uri="{FF2B5EF4-FFF2-40B4-BE49-F238E27FC236}">
+                <a16:creationId xmlns:a16="http://schemas.microsoft.com/office/drawing/2014/main" id="{EF13DEE3-CEBD-88C2-D1B3-24DB25C3324A}"/>
+              </a:ext>
+            </a:extLst>
+          </p:cNvPr>
+          <p:cNvCxnSpPr>
+            <a:cxnSpLocks/>
+          </p:cNvCxnSpPr>
+          <p:nvPr/>
+        </p:nvCxnSpPr>
+        <p:spPr>
+          <a:xfrm rot="5400000" flipV="1">
+            <a:off x="8854969" y="2267707"/>
+            <a:ext cx="0" cy="731317"/>
+          </a:xfrm>
+          <a:prstGeom prst="straightConnector1">
+            <a:avLst/>
+          </a:prstGeom>
+          <a:ln>
+            <a:headEnd type="triangle" w="lg" len="lg"/>
+            <a:tailEnd type="triangle" w="lg" len="lg"/>
+          </a:ln>
+        </p:spPr>
+        <p:style>
+          <a:lnRef idx="2">
+            <a:schemeClr val="accent1"/>
+          </a:lnRef>
+          <a:fillRef idx="0">
+            <a:schemeClr val="accent1"/>
+          </a:fillRef>
+          <a:effectRef idx="1">
+            <a:schemeClr val="accent1"/>
+          </a:effectRef>
+          <a:fontRef idx="minor">
+            <a:schemeClr val="tx1"/>
+          </a:fontRef>
+        </p:style>
+      </p:cxnSp>
+      <p:cxnSp>
+        <p:nvCxnSpPr>
+          <p:cNvPr id="98" name="Straight Arrow Connector 97">
+            <a:extLst>
+              <a:ext uri="{FF2B5EF4-FFF2-40B4-BE49-F238E27FC236}">
+                <a16:creationId xmlns:a16="http://schemas.microsoft.com/office/drawing/2014/main" id="{BF1B0B23-43E2-96ED-A0F3-3410241EDDED}"/>
+              </a:ext>
+            </a:extLst>
+          </p:cNvPr>
+          <p:cNvCxnSpPr>
+            <a:cxnSpLocks/>
+          </p:cNvCxnSpPr>
+          <p:nvPr/>
+        </p:nvCxnSpPr>
+        <p:spPr>
+          <a:xfrm rot="5400000" flipH="1">
+            <a:off x="8805533" y="3977906"/>
+            <a:ext cx="1344072" cy="0"/>
+          </a:xfrm>
+          <a:prstGeom prst="straightConnector1">
+            <a:avLst/>
+          </a:prstGeom>
+          <a:ln>
+            <a:headEnd type="triangle" w="lg" len="lg"/>
+            <a:tailEnd type="triangle" w="lg" len="lg"/>
+          </a:ln>
+        </p:spPr>
+        <p:style>
+          <a:lnRef idx="2">
+            <a:schemeClr val="accent1"/>
+          </a:lnRef>
+          <a:fillRef idx="0">
+            <a:schemeClr val="accent1"/>
+          </a:fillRef>
+          <a:effectRef idx="1">
+            <a:schemeClr val="accent1"/>
+          </a:effectRef>
+          <a:fontRef idx="minor">
+            <a:schemeClr val="tx1"/>
+          </a:fontRef>
+        </p:style>
+      </p:cxnSp>
+      <p:sp>
+        <p:nvSpPr>
+          <p:cNvPr id="100" name="TextBox 99">
+            <a:extLst>
+              <a:ext uri="{FF2B5EF4-FFF2-40B4-BE49-F238E27FC236}">
+                <a16:creationId xmlns:a16="http://schemas.microsoft.com/office/drawing/2014/main" id="{ABF27080-ACF0-3D3A-E8F6-8DD07805A70F}"/>
+              </a:ext>
+            </a:extLst>
+          </p:cNvPr>
+          <p:cNvSpPr txBox="1"/>
+          <p:nvPr/>
+        </p:nvSpPr>
+        <p:spPr>
+          <a:xfrm rot="16200000">
+            <a:off x="9590697" y="3543427"/>
+            <a:ext cx="473206" cy="369332"/>
+          </a:xfrm>
+          <a:prstGeom prst="rect">
+            <a:avLst/>
+          </a:prstGeom>
+          <a:solidFill>
+            <a:schemeClr val="bg1">
+              <a:alpha val="53000"/>
+            </a:schemeClr>
+          </a:solidFill>
+        </p:spPr>
+        <p:txBody>
+          <a:bodyPr wrap="none" rtlCol="0">
+            <a:spAutoFit/>
+          </a:bodyPr>
+          <a:lstStyle/>
+          <a:p>
+            <a:r>
+              <a:rPr lang="en-US" dirty="0"/>
+              <a:t>l_6</a:t>
+            </a:r>
+          </a:p>
+        </p:txBody>
+      </p:sp>
+      <p:sp>
+        <p:nvSpPr>
+          <p:cNvPr id="111" name="TextBox 110">
+            <a:extLst>
+              <a:ext uri="{FF2B5EF4-FFF2-40B4-BE49-F238E27FC236}">
+                <a16:creationId xmlns:a16="http://schemas.microsoft.com/office/drawing/2014/main" id="{6E537278-6851-F5AE-B4CE-31D52738DA4B}"/>
+              </a:ext>
+            </a:extLst>
+          </p:cNvPr>
+          <p:cNvSpPr txBox="1"/>
+          <p:nvPr/>
+        </p:nvSpPr>
+        <p:spPr>
+          <a:xfrm>
+            <a:off x="8746255" y="5262469"/>
+            <a:ext cx="564578" cy="369332"/>
+          </a:xfrm>
+          <a:prstGeom prst="rect">
+            <a:avLst/>
+          </a:prstGeom>
+          <a:solidFill>
+            <a:schemeClr val="bg1">
+              <a:alpha val="53000"/>
+            </a:schemeClr>
+          </a:solidFill>
+        </p:spPr>
+        <p:txBody>
+          <a:bodyPr wrap="none" rtlCol="0">
+            <a:spAutoFit/>
+          </a:bodyPr>
+          <a:lstStyle/>
+          <a:p>
+            <a:r>
+              <a:rPr lang="en-US" dirty="0"/>
+              <a:t>P18</a:t>
+            </a:r>
+          </a:p>
+        </p:txBody>
+      </p:sp>
+      <p:sp>
+        <p:nvSpPr>
+          <p:cNvPr id="128" name="TextBox 127">
+            <a:extLst>
+              <a:ext uri="{FF2B5EF4-FFF2-40B4-BE49-F238E27FC236}">
+                <a16:creationId xmlns:a16="http://schemas.microsoft.com/office/drawing/2014/main" id="{BA5E1F23-D8F3-1D01-599F-0F492690F242}"/>
+              </a:ext>
+            </a:extLst>
+          </p:cNvPr>
+          <p:cNvSpPr txBox="1"/>
+          <p:nvPr/>
+        </p:nvSpPr>
+        <p:spPr>
+          <a:xfrm>
+            <a:off x="3875671" y="3145478"/>
+            <a:ext cx="441146" cy="369332"/>
+          </a:xfrm>
+          <a:prstGeom prst="rect">
+            <a:avLst/>
+          </a:prstGeom>
+          <a:solidFill>
+            <a:schemeClr val="bg1">
+              <a:alpha val="53000"/>
+            </a:schemeClr>
+          </a:solidFill>
+        </p:spPr>
+        <p:txBody>
+          <a:bodyPr wrap="none" rtlCol="0">
+            <a:spAutoFit/>
+          </a:bodyPr>
+          <a:lstStyle/>
+          <a:p>
+            <a:r>
+              <a:rPr lang="en-US" dirty="0"/>
+              <a:t>P7</a:t>
+            </a:r>
+          </a:p>
+        </p:txBody>
+      </p:sp>
+      <p:sp>
+        <p:nvSpPr>
+          <p:cNvPr id="130" name="TextBox 129">
+            <a:extLst>
+              <a:ext uri="{FF2B5EF4-FFF2-40B4-BE49-F238E27FC236}">
+                <a16:creationId xmlns:a16="http://schemas.microsoft.com/office/drawing/2014/main" id="{92CCB8FB-C2E0-707A-6AA1-5CC93EE5FD45}"/>
+              </a:ext>
+            </a:extLst>
+          </p:cNvPr>
+          <p:cNvSpPr txBox="1"/>
+          <p:nvPr/>
+        </p:nvSpPr>
+        <p:spPr>
+          <a:xfrm>
+            <a:off x="3799071" y="3872890"/>
+            <a:ext cx="441146" cy="369332"/>
+          </a:xfrm>
+          <a:prstGeom prst="rect">
+            <a:avLst/>
+          </a:prstGeom>
+          <a:solidFill>
+            <a:schemeClr val="bg1">
+              <a:alpha val="53000"/>
+            </a:schemeClr>
+          </a:solidFill>
+        </p:spPr>
+        <p:txBody>
+          <a:bodyPr wrap="none" rtlCol="0">
+            <a:spAutoFit/>
+          </a:bodyPr>
+          <a:lstStyle/>
+          <a:p>
+            <a:r>
+              <a:rPr lang="en-US" dirty="0"/>
+              <a:t>P8</a:t>
+            </a:r>
+          </a:p>
+        </p:txBody>
+      </p:sp>
+      <p:sp>
+        <p:nvSpPr>
+          <p:cNvPr id="132" name="TextBox 131">
+            <a:extLst>
+              <a:ext uri="{FF2B5EF4-FFF2-40B4-BE49-F238E27FC236}">
+                <a16:creationId xmlns:a16="http://schemas.microsoft.com/office/drawing/2014/main" id="{307052A8-3629-92CB-79CD-6AFFE13D977F}"/>
+              </a:ext>
+            </a:extLst>
+          </p:cNvPr>
+          <p:cNvSpPr txBox="1"/>
+          <p:nvPr/>
+        </p:nvSpPr>
+        <p:spPr>
+          <a:xfrm>
+            <a:off x="5635970" y="3626971"/>
+            <a:ext cx="441146" cy="369332"/>
+          </a:xfrm>
+          <a:prstGeom prst="rect">
+            <a:avLst/>
+          </a:prstGeom>
+          <a:solidFill>
+            <a:schemeClr val="bg1">
+              <a:alpha val="53000"/>
+            </a:schemeClr>
+          </a:solidFill>
+        </p:spPr>
+        <p:txBody>
+          <a:bodyPr wrap="none" rtlCol="0">
+            <a:spAutoFit/>
+          </a:bodyPr>
+          <a:lstStyle/>
+          <a:p>
+            <a:r>
+              <a:rPr lang="en-US" dirty="0"/>
+              <a:t>P9</a:t>
+            </a:r>
+          </a:p>
+        </p:txBody>
+      </p:sp>
+      <p:sp>
+        <p:nvSpPr>
+          <p:cNvPr id="134" name="TextBox 133">
+            <a:extLst>
+              <a:ext uri="{FF2B5EF4-FFF2-40B4-BE49-F238E27FC236}">
+                <a16:creationId xmlns:a16="http://schemas.microsoft.com/office/drawing/2014/main" id="{A581A047-FA32-41F9-18C7-92F990589AE0}"/>
+              </a:ext>
+            </a:extLst>
+          </p:cNvPr>
+          <p:cNvSpPr txBox="1"/>
+          <p:nvPr/>
+        </p:nvSpPr>
+        <p:spPr>
+          <a:xfrm>
+            <a:off x="5293644" y="4506206"/>
+            <a:ext cx="564578" cy="369332"/>
+          </a:xfrm>
+          <a:prstGeom prst="rect">
+            <a:avLst/>
+          </a:prstGeom>
+          <a:solidFill>
+            <a:schemeClr val="bg1">
+              <a:alpha val="53000"/>
+            </a:schemeClr>
+          </a:solidFill>
+        </p:spPr>
+        <p:txBody>
+          <a:bodyPr wrap="none" rtlCol="0">
+            <a:spAutoFit/>
+          </a:bodyPr>
+          <a:lstStyle/>
+          <a:p>
+            <a:r>
+              <a:rPr lang="en-US" dirty="0"/>
+              <a:t>P10</a:t>
+            </a:r>
+          </a:p>
+        </p:txBody>
+      </p:sp>
+      <p:cxnSp>
+        <p:nvCxnSpPr>
+          <p:cNvPr id="137" name="Straight Connector 136">
+            <a:extLst>
+              <a:ext uri="{FF2B5EF4-FFF2-40B4-BE49-F238E27FC236}">
+                <a16:creationId xmlns:a16="http://schemas.microsoft.com/office/drawing/2014/main" id="{0EF51669-21EC-28A0-937F-FAC1618905E0}"/>
+              </a:ext>
+            </a:extLst>
+          </p:cNvPr>
+          <p:cNvCxnSpPr>
+            <a:cxnSpLocks/>
+          </p:cNvCxnSpPr>
+          <p:nvPr/>
+        </p:nvCxnSpPr>
+        <p:spPr>
+          <a:xfrm>
+            <a:off x="5763584" y="2657008"/>
+            <a:ext cx="0" cy="674553"/>
+          </a:xfrm>
+          <a:prstGeom prst="line">
+            <a:avLst/>
+          </a:prstGeom>
+          <a:ln w="38100">
+            <a:solidFill>
+              <a:schemeClr val="accent2"/>
+            </a:solidFill>
+          </a:ln>
+        </p:spPr>
+        <p:style>
+          <a:lnRef idx="2">
+            <a:schemeClr val="accent1"/>
+          </a:lnRef>
+          <a:fillRef idx="0">
+            <a:schemeClr val="accent1"/>
+          </a:fillRef>
+          <a:effectRef idx="1">
+            <a:schemeClr val="accent1"/>
+          </a:effectRef>
+          <a:fontRef idx="minor">
+            <a:schemeClr val="tx1"/>
+          </a:fontRef>
+        </p:style>
+      </p:cxnSp>
+      <p:sp>
+        <p:nvSpPr>
+          <p:cNvPr id="141" name="TextBox 140">
+            <a:extLst>
+              <a:ext uri="{FF2B5EF4-FFF2-40B4-BE49-F238E27FC236}">
+                <a16:creationId xmlns:a16="http://schemas.microsoft.com/office/drawing/2014/main" id="{F3FE968C-2EB3-3FAE-AB5A-11A6B1F656AF}"/>
+              </a:ext>
+            </a:extLst>
+          </p:cNvPr>
+          <p:cNvSpPr txBox="1"/>
+          <p:nvPr/>
+        </p:nvSpPr>
+        <p:spPr>
+          <a:xfrm>
+            <a:off x="4558158" y="4433086"/>
+            <a:ext cx="473206" cy="369332"/>
+          </a:xfrm>
+          <a:prstGeom prst="rect">
+            <a:avLst/>
+          </a:prstGeom>
+          <a:solidFill>
+            <a:schemeClr val="bg1">
+              <a:alpha val="53000"/>
+            </a:schemeClr>
+          </a:solidFill>
+        </p:spPr>
+        <p:txBody>
+          <a:bodyPr wrap="none" rtlCol="0">
+            <a:spAutoFit/>
+          </a:bodyPr>
+          <a:lstStyle/>
+          <a:p>
+            <a:r>
+              <a:rPr lang="en-US" dirty="0"/>
+              <a:t>l_8</a:t>
+            </a:r>
+          </a:p>
+        </p:txBody>
+      </p:sp>
+      <p:sp>
+        <p:nvSpPr>
+          <p:cNvPr id="143" name="TextBox 142">
+            <a:extLst>
+              <a:ext uri="{FF2B5EF4-FFF2-40B4-BE49-F238E27FC236}">
+                <a16:creationId xmlns:a16="http://schemas.microsoft.com/office/drawing/2014/main" id="{F31AACBB-4782-76CB-5B67-5A9399F83639}"/>
+              </a:ext>
+            </a:extLst>
+          </p:cNvPr>
+          <p:cNvSpPr txBox="1"/>
+          <p:nvPr/>
+        </p:nvSpPr>
+        <p:spPr>
+          <a:xfrm>
+            <a:off x="3180973" y="3496430"/>
+            <a:ext cx="473206" cy="369332"/>
+          </a:xfrm>
+          <a:prstGeom prst="rect">
+            <a:avLst/>
+          </a:prstGeom>
+          <a:solidFill>
+            <a:schemeClr val="bg1">
+              <a:alpha val="53000"/>
+            </a:schemeClr>
+          </a:solidFill>
+        </p:spPr>
+        <p:txBody>
+          <a:bodyPr wrap="none" rtlCol="0">
+            <a:spAutoFit/>
+          </a:bodyPr>
+          <a:lstStyle/>
+          <a:p>
+            <a:r>
+              <a:rPr lang="en-US" dirty="0"/>
+              <a:t>l_7</a:t>
+            </a:r>
+          </a:p>
+        </p:txBody>
+      </p:sp>
+      <p:cxnSp>
+        <p:nvCxnSpPr>
+          <p:cNvPr id="144" name="Straight Arrow Connector 143">
+            <a:extLst>
+              <a:ext uri="{FF2B5EF4-FFF2-40B4-BE49-F238E27FC236}">
+                <a16:creationId xmlns:a16="http://schemas.microsoft.com/office/drawing/2014/main" id="{E8D50215-59F3-2658-628E-09F85FD74767}"/>
+              </a:ext>
+            </a:extLst>
+          </p:cNvPr>
+          <p:cNvCxnSpPr>
+            <a:cxnSpLocks/>
+          </p:cNvCxnSpPr>
+          <p:nvPr/>
+        </p:nvCxnSpPr>
+        <p:spPr>
+          <a:xfrm flipV="1">
+            <a:off x="3795643" y="3353933"/>
+            <a:ext cx="0" cy="731317"/>
+          </a:xfrm>
+          <a:prstGeom prst="straightConnector1">
+            <a:avLst/>
+          </a:prstGeom>
+          <a:ln>
+            <a:headEnd type="triangle" w="lg" len="lg"/>
+            <a:tailEnd type="triangle" w="lg" len="lg"/>
+          </a:ln>
+        </p:spPr>
+        <p:style>
+          <a:lnRef idx="2">
+            <a:schemeClr val="accent1"/>
+          </a:lnRef>
+          <a:fillRef idx="0">
+            <a:schemeClr val="accent1"/>
+          </a:fillRef>
+          <a:effectRef idx="1">
+            <a:schemeClr val="accent1"/>
+          </a:effectRef>
+          <a:fontRef idx="minor">
+            <a:schemeClr val="tx1"/>
+          </a:fontRef>
+        </p:style>
+      </p:cxnSp>
     </p:spTree>
     <p:extLst>
       <p:ext uri="{BB962C8B-B14F-4D97-AF65-F5344CB8AC3E}">

--- a/figures/CST_TTD_polyline_coord.pptx
+++ b/figures/CST_TTD_polyline_coord.pptx
@@ -243,7 +243,7 @@
           <a:p>
             <a:fld id="{4841CCDE-90AE-4DC4-86E7-13D12ED34910}" type="datetimeFigureOut">
               <a:rPr lang="en-US" smtClean="0"/>
-              <a:t>6/10/2026</a:t>
+              <a:t>6/20/2026</a:t>
             </a:fld>
             <a:endParaRPr lang="en-US"/>
           </a:p>
@@ -413,7 +413,7 @@
           <a:p>
             <a:fld id="{4841CCDE-90AE-4DC4-86E7-13D12ED34910}" type="datetimeFigureOut">
               <a:rPr lang="en-US" smtClean="0"/>
-              <a:t>6/10/2026</a:t>
+              <a:t>6/20/2026</a:t>
             </a:fld>
             <a:endParaRPr lang="en-US"/>
           </a:p>
@@ -593,7 +593,7 @@
           <a:p>
             <a:fld id="{4841CCDE-90AE-4DC4-86E7-13D12ED34910}" type="datetimeFigureOut">
               <a:rPr lang="en-US" smtClean="0"/>
-              <a:t>6/10/2026</a:t>
+              <a:t>6/20/2026</a:t>
             </a:fld>
             <a:endParaRPr lang="en-US"/>
           </a:p>
@@ -763,7 +763,7 @@
           <a:p>
             <a:fld id="{4841CCDE-90AE-4DC4-86E7-13D12ED34910}" type="datetimeFigureOut">
               <a:rPr lang="en-US" smtClean="0"/>
-              <a:t>6/10/2026</a:t>
+              <a:t>6/20/2026</a:t>
             </a:fld>
             <a:endParaRPr lang="en-US"/>
           </a:p>
@@ -1009,7 +1009,7 @@
           <a:p>
             <a:fld id="{4841CCDE-90AE-4DC4-86E7-13D12ED34910}" type="datetimeFigureOut">
               <a:rPr lang="en-US" smtClean="0"/>
-              <a:t>6/10/2026</a:t>
+              <a:t>6/20/2026</a:t>
             </a:fld>
             <a:endParaRPr lang="en-US"/>
           </a:p>
@@ -1241,7 +1241,7 @@
           <a:p>
             <a:fld id="{4841CCDE-90AE-4DC4-86E7-13D12ED34910}" type="datetimeFigureOut">
               <a:rPr lang="en-US" smtClean="0"/>
-              <a:t>6/10/2026</a:t>
+              <a:t>6/20/2026</a:t>
             </a:fld>
             <a:endParaRPr lang="en-US"/>
           </a:p>
@@ -1608,7 +1608,7 @@
           <a:p>
             <a:fld id="{4841CCDE-90AE-4DC4-86E7-13D12ED34910}" type="datetimeFigureOut">
               <a:rPr lang="en-US" smtClean="0"/>
-              <a:t>6/10/2026</a:t>
+              <a:t>6/20/2026</a:t>
             </a:fld>
             <a:endParaRPr lang="en-US"/>
           </a:p>
@@ -1726,7 +1726,7 @@
           <a:p>
             <a:fld id="{4841CCDE-90AE-4DC4-86E7-13D12ED34910}" type="datetimeFigureOut">
               <a:rPr lang="en-US" smtClean="0"/>
-              <a:t>6/10/2026</a:t>
+              <a:t>6/20/2026</a:t>
             </a:fld>
             <a:endParaRPr lang="en-US"/>
           </a:p>
@@ -1821,7 +1821,7 @@
           <a:p>
             <a:fld id="{4841CCDE-90AE-4DC4-86E7-13D12ED34910}" type="datetimeFigureOut">
               <a:rPr lang="en-US" smtClean="0"/>
-              <a:t>6/10/2026</a:t>
+              <a:t>6/20/2026</a:t>
             </a:fld>
             <a:endParaRPr lang="en-US"/>
           </a:p>
@@ -2098,7 +2098,7 @@
           <a:p>
             <a:fld id="{4841CCDE-90AE-4DC4-86E7-13D12ED34910}" type="datetimeFigureOut">
               <a:rPr lang="en-US" smtClean="0"/>
-              <a:t>6/10/2026</a:t>
+              <a:t>6/20/2026</a:t>
             </a:fld>
             <a:endParaRPr lang="en-US"/>
           </a:p>
@@ -2355,7 +2355,7 @@
           <a:p>
             <a:fld id="{4841CCDE-90AE-4DC4-86E7-13D12ED34910}" type="datetimeFigureOut">
               <a:rPr lang="en-US" smtClean="0"/>
-              <a:t>6/10/2026</a:t>
+              <a:t>6/20/2026</a:t>
             </a:fld>
             <a:endParaRPr lang="en-US"/>
           </a:p>
@@ -2568,7 +2568,7 @@
           <a:p>
             <a:fld id="{4841CCDE-90AE-4DC4-86E7-13D12ED34910}" type="datetimeFigureOut">
               <a:rPr lang="en-US" smtClean="0"/>
-              <a:t>6/10/2026</a:t>
+              <a:t>6/20/2026</a:t>
             </a:fld>
             <a:endParaRPr lang="en-US"/>
           </a:p>
@@ -2989,8 +2989,8 @@
         </p:nvCxnSpPr>
         <p:spPr>
           <a:xfrm>
-            <a:off x="5840052" y="624018"/>
-            <a:ext cx="11903" cy="7447357"/>
+            <a:off x="5754032" y="177642"/>
+            <a:ext cx="97923" cy="7893733"/>
           </a:xfrm>
           <a:prstGeom prst="straightConnector1">
             <a:avLst/>
@@ -5212,7 +5212,7 @@
         </p:nvSpPr>
         <p:spPr>
           <a:xfrm>
-            <a:off x="5346265" y="504392"/>
+            <a:off x="5327688" y="737384"/>
             <a:ext cx="441146" cy="369332"/>
           </a:xfrm>
           <a:prstGeom prst="rect">
@@ -6804,7 +6804,7 @@
         </p:nvSpPr>
         <p:spPr>
           <a:xfrm>
-            <a:off x="5422407" y="0"/>
+            <a:off x="5366200" y="-34171"/>
             <a:ext cx="287258" cy="369332"/>
           </a:xfrm>
           <a:prstGeom prst="rect">
